--- a/Thesis/CHEN 323 Heat Transfer.pptx
+++ b/Thesis/CHEN 323 Heat Transfer.pptx
@@ -5,19 +5,28 @@
     <p:sldMasterId id="2147483717" r:id="rId1"/>
   </p:sldMasterIdLst>
   <p:notesMasterIdLst>
-    <p:notesMasterId r:id="rId7"/>
+    <p:notesMasterId r:id="rId16"/>
   </p:notesMasterIdLst>
   <p:sldIdLst>
     <p:sldId id="256" r:id="rId2"/>
-    <p:sldId id="450" r:id="rId3"/>
-    <p:sldId id="451" r:id="rId4"/>
-    <p:sldId id="449" r:id="rId5"/>
-    <p:sldId id="423" r:id="rId6"/>
+    <p:sldId id="452" r:id="rId3"/>
+    <p:sldId id="450" r:id="rId4"/>
+    <p:sldId id="451" r:id="rId5"/>
+    <p:sldId id="453" r:id="rId6"/>
+    <p:sldId id="454" r:id="rId7"/>
+    <p:sldId id="455" r:id="rId8"/>
+    <p:sldId id="456" r:id="rId9"/>
+    <p:sldId id="460" r:id="rId10"/>
+    <p:sldId id="457" r:id="rId11"/>
+    <p:sldId id="459" r:id="rId12"/>
+    <p:sldId id="458" r:id="rId13"/>
+    <p:sldId id="461" r:id="rId14"/>
+    <p:sldId id="423" r:id="rId15"/>
   </p:sldIdLst>
   <p:sldSz cx="12192000" cy="6858000"/>
   <p:notesSz cx="6400800" cy="8686800"/>
   <p:custDataLst>
-    <p:tags r:id="rId8"/>
+    <p:tags r:id="rId17"/>
   </p:custDataLst>
   <p:defaultTextStyle>
     <a:defPPr>
@@ -120,13 +129,19 @@
         <p14:section name="Default Section" id="{73E2CC71-5728-4712-8B7B-8184A42EDAFC}">
           <p14:sldIdLst>
             <p14:sldId id="256"/>
+            <p14:sldId id="452"/>
             <p14:sldId id="450"/>
             <p14:sldId id="451"/>
-            <p14:sldId id="449"/>
+            <p14:sldId id="453"/>
+            <p14:sldId id="454"/>
+            <p14:sldId id="455"/>
+            <p14:sldId id="456"/>
+            <p14:sldId id="460"/>
+            <p14:sldId id="457"/>
+            <p14:sldId id="459"/>
+            <p14:sldId id="458"/>
+            <p14:sldId id="461"/>
           </p14:sldIdLst>
-        </p14:section>
-        <p14:section name="1" id="{AB3037F6-7600-4584-A700-9D01C83702F2}">
-          <p14:sldIdLst/>
         </p14:section>
         <p14:section name="New" id="{00CC9CBE-583A-4CC5-BA20-4434A85229F6}">
           <p14:sldIdLst>
@@ -260,7 +275,7 @@
           <a:p>
             <a:fld id="{06DF9DF1-C5FE-4B76-9709-542FE384B1DD}" type="datetimeFigureOut">
               <a:rPr lang="en-US" smtClean="0"/>
-              <a:t>4/16/2026</a:t>
+              <a:t>4/18/2026</a:t>
             </a:fld>
             <a:endParaRPr lang="en-US"/>
           </a:p>
@@ -736,7 +751,7 @@
                 <a:tabLst/>
                 <a:defRPr/>
               </a:pPr>
-              <a:t>5</a:t>
+              <a:t>14</a:t>
             </a:fld>
             <a:endParaRPr kumimoji="0" lang="en-US" sz="1200" b="0" i="0" u="none" strike="noStrike" kern="1200" cap="none" spc="0" normalizeH="0" baseline="0" noProof="0">
               <a:ln>
@@ -1375,7 +1390,7 @@
 
 <file path=ppt/slideLayouts/slideLayout10.xml><?xml version="1.0" encoding="utf-8"?>
 <p:sldLayout xmlns:a="http://schemas.openxmlformats.org/drawingml/2006/main" xmlns:r="http://schemas.openxmlformats.org/officeDocument/2006/relationships" xmlns:p="http://schemas.openxmlformats.org/presentationml/2006/main" preserve="1" userDrawn="1">
-  <p:cSld name="28_1">
+  <p:cSld name="Julia">
     <p:spTree>
       <p:nvGrpSpPr>
         <p:cNvPr id="1" name=""/>
@@ -1953,7 +1968,7 @@
 
 <file path=ppt/slideLayouts/slideLayout11.xml><?xml version="1.0" encoding="utf-8"?>
 <p:sldLayout xmlns:a="http://schemas.openxmlformats.org/drawingml/2006/main" xmlns:r="http://schemas.openxmlformats.org/officeDocument/2006/relationships" xmlns:p="http://schemas.openxmlformats.org/presentationml/2006/main" preserve="1" userDrawn="1">
-  <p:cSld name="29_1">
+  <p:cSld name="Case study">
     <p:spTree>
       <p:nvGrpSpPr>
         <p:cNvPr id="1" name=""/>
@@ -2531,7 +2546,7 @@
 
 <file path=ppt/slideLayouts/slideLayout12.xml><?xml version="1.0" encoding="utf-8"?>
 <p:sldLayout xmlns:a="http://schemas.openxmlformats.org/drawingml/2006/main" xmlns:r="http://schemas.openxmlformats.org/officeDocument/2006/relationships" xmlns:p="http://schemas.openxmlformats.org/presentationml/2006/main" preserve="1" userDrawn="1">
-  <p:cSld name="30_1">
+  <p:cSld name="Αποτελέσματα">
     <p:spTree>
       <p:nvGrpSpPr>
         <p:cNvPr id="1" name=""/>
@@ -5404,7 +5419,7 @@
 
 <file path=ppt/slideLayouts/slideLayout5.xml><?xml version="1.0" encoding="utf-8"?>
 <p:sldLayout xmlns:a="http://schemas.openxmlformats.org/drawingml/2006/main" xmlns:r="http://schemas.openxmlformats.org/officeDocument/2006/relationships" xmlns:p="http://schemas.openxmlformats.org/presentationml/2006/main" preserve="1" userDrawn="1">
-  <p:cSld name="23_1">
+  <p:cSld name="Βιβλιογραφία">
     <p:spTree>
       <p:nvGrpSpPr>
         <p:cNvPr id="1" name=""/>
@@ -5982,7 +5997,7 @@
 
 <file path=ppt/slideLayouts/slideLayout6.xml><?xml version="1.0" encoding="utf-8"?>
 <p:sldLayout xmlns:a="http://schemas.openxmlformats.org/drawingml/2006/main" xmlns:r="http://schemas.openxmlformats.org/officeDocument/2006/relationships" xmlns:p="http://schemas.openxmlformats.org/presentationml/2006/main" preserve="1" userDrawn="1">
-  <p:cSld name="24_1">
+  <p:cSld name="Μοντέλα συμπεριφοράς">
     <p:spTree>
       <p:nvGrpSpPr>
         <p:cNvPr id="1" name=""/>
@@ -6560,7 +6575,7 @@
 
 <file path=ppt/slideLayouts/slideLayout7.xml><?xml version="1.0" encoding="utf-8"?>
 <p:sldLayout xmlns:a="http://schemas.openxmlformats.org/drawingml/2006/main" xmlns:r="http://schemas.openxmlformats.org/officeDocument/2006/relationships" xmlns:p="http://schemas.openxmlformats.org/presentationml/2006/main" preserve="1" userDrawn="1">
-  <p:cSld name="25_1">
+  <p:cSld name="Είδη κινδύνου">
     <p:spTree>
       <p:nvGrpSpPr>
         <p:cNvPr id="1" name=""/>
@@ -7138,7 +7153,7 @@
 
 <file path=ppt/slideLayouts/slideLayout8.xml><?xml version="1.0" encoding="utf-8"?>
 <p:sldLayout xmlns:a="http://schemas.openxmlformats.org/drawingml/2006/main" xmlns:r="http://schemas.openxmlformats.org/officeDocument/2006/relationships" xmlns:p="http://schemas.openxmlformats.org/presentationml/2006/main" preserve="1" userDrawn="1">
-  <p:cSld name="26_1">
+  <p:cSld name="Επιπτώσεις υγείας">
     <p:spTree>
       <p:nvGrpSpPr>
         <p:cNvPr id="1" name=""/>
@@ -7716,7 +7731,7 @@
 
 <file path=ppt/slideLayouts/slideLayout9.xml><?xml version="1.0" encoding="utf-8"?>
 <p:sldLayout xmlns:a="http://schemas.openxmlformats.org/drawingml/2006/main" xmlns:r="http://schemas.openxmlformats.org/officeDocument/2006/relationships" xmlns:p="http://schemas.openxmlformats.org/presentationml/2006/main" preserve="1" userDrawn="1">
-  <p:cSld name="27_1">
+  <p:cSld name="Pathfinding">
     <p:spTree>
       <p:nvGrpSpPr>
         <p:cNvPr id="1" name=""/>
@@ -9320,682 +9335,7 @@
 </p:sld>
 </file>
 
-<file path=ppt/slides/slide2.xml><?xml version="1.0" encoding="utf-8"?>
-<p:sld xmlns:a="http://schemas.openxmlformats.org/drawingml/2006/main" xmlns:r="http://schemas.openxmlformats.org/officeDocument/2006/relationships" xmlns:p="http://schemas.openxmlformats.org/presentationml/2006/main">
-  <p:cSld>
-    <p:spTree>
-      <p:nvGrpSpPr>
-        <p:cNvPr id="1" name=""/>
-        <p:cNvGrpSpPr/>
-        <p:nvPr/>
-      </p:nvGrpSpPr>
-      <p:grpSpPr>
-        <a:xfrm>
-          <a:off x="0" y="0"/>
-          <a:ext cx="0" cy="0"/>
-          <a:chOff x="0" y="0"/>
-          <a:chExt cx="0" cy="0"/>
-        </a:xfrm>
-      </p:grpSpPr>
-      <p:sp>
-        <p:nvSpPr>
-          <p:cNvPr id="4" name="Slide Number Placeholder 3">
-            <a:extLst>
-              <a:ext uri="{FF2B5EF4-FFF2-40B4-BE49-F238E27FC236}">
-                <a16:creationId xmlns:a16="http://schemas.microsoft.com/office/drawing/2014/main" id="{1573CAB2-A1FC-4F2C-5835-46902E4B4CD5}"/>
-              </a:ext>
-            </a:extLst>
-          </p:cNvPr>
-          <p:cNvSpPr>
-            <a:spLocks noGrp="1"/>
-          </p:cNvSpPr>
-          <p:nvPr>
-            <p:ph type="sldNum" sz="quarter" idx="4"/>
-          </p:nvPr>
-        </p:nvSpPr>
-        <p:spPr/>
-        <p:txBody>
-          <a:bodyPr/>
-          <a:lstStyle/>
-          <a:p>
-            <a:fld id="{3490C777-6B35-47B1-993A-7400E925DBDB}" type="slidenum">
-              <a:rPr lang="en-US" smtClean="0"/>
-              <a:pPr/>
-              <a:t>2</a:t>
-            </a:fld>
-            <a:endParaRPr lang="en-US" dirty="0">
-              <a:latin typeface="Aptos" panose="020B0004020202020204" pitchFamily="34" charset="0"/>
-            </a:endParaRPr>
-          </a:p>
-        </p:txBody>
-      </p:sp>
-      <p:sp>
-        <p:nvSpPr>
-          <p:cNvPr id="2" name="Title 1">
-            <a:extLst>
-              <a:ext uri="{FF2B5EF4-FFF2-40B4-BE49-F238E27FC236}">
-                <a16:creationId xmlns:a16="http://schemas.microsoft.com/office/drawing/2014/main" id="{801DC17D-E0A7-2593-B42B-65B53BBD6621}"/>
-              </a:ext>
-            </a:extLst>
-          </p:cNvPr>
-          <p:cNvSpPr>
-            <a:spLocks noGrp="1"/>
-          </p:cNvSpPr>
-          <p:nvPr>
-            <p:ph type="title"/>
-          </p:nvPr>
-        </p:nvSpPr>
-        <p:spPr/>
-        <p:txBody>
-          <a:bodyPr/>
-          <a:lstStyle/>
-          <a:p>
-            <a:r>
-              <a:rPr lang="el-GR" dirty="0"/>
-              <a:t>Δομή Παρουσίασης</a:t>
-            </a:r>
-            <a:endParaRPr lang="en-US" dirty="0"/>
-          </a:p>
-        </p:txBody>
-      </p:sp>
-      <p:pic>
-        <p:nvPicPr>
-          <p:cNvPr id="27" name="Picture 26">
-            <a:extLst>
-              <a:ext uri="{FF2B5EF4-FFF2-40B4-BE49-F238E27FC236}">
-                <a16:creationId xmlns:a16="http://schemas.microsoft.com/office/drawing/2014/main" id="{196256EA-ED74-005C-B3DC-EC7354C773D8}"/>
-              </a:ext>
-            </a:extLst>
-          </p:cNvPr>
-          <p:cNvPicPr>
-            <a:picLocks noChangeAspect="1"/>
-          </p:cNvPicPr>
-          <p:nvPr/>
-        </p:nvPicPr>
-        <p:blipFill>
-          <a:blip r:embed="rId2" cstate="print">
-            <a:extLst>
-              <a:ext uri="{28A0092B-C50C-407E-A947-70E740481C1C}">
-                <a14:useLocalDpi xmlns:a14="http://schemas.microsoft.com/office/drawing/2010/main" val="0"/>
-              </a:ext>
-            </a:extLst>
-          </a:blip>
-          <a:stretch>
-            <a:fillRect/>
-          </a:stretch>
-        </p:blipFill>
-        <p:spPr>
-          <a:xfrm>
-            <a:off x="6926636" y="3688965"/>
-            <a:ext cx="1010697" cy="1010697"/>
-          </a:xfrm>
-          <a:prstGeom prst="rect">
-            <a:avLst/>
-          </a:prstGeom>
-        </p:spPr>
-      </p:pic>
-      <p:pic>
-        <p:nvPicPr>
-          <p:cNvPr id="29" name="Picture 28">
-            <a:extLst>
-              <a:ext uri="{FF2B5EF4-FFF2-40B4-BE49-F238E27FC236}">
-                <a16:creationId xmlns:a16="http://schemas.microsoft.com/office/drawing/2014/main" id="{69B4583C-7192-4963-C04F-5B2CBA607B6B}"/>
-              </a:ext>
-            </a:extLst>
-          </p:cNvPr>
-          <p:cNvPicPr>
-            <a:picLocks noChangeAspect="1"/>
-          </p:cNvPicPr>
-          <p:nvPr/>
-        </p:nvPicPr>
-        <p:blipFill>
-          <a:blip r:embed="rId3" cstate="print">
-            <a:extLst>
-              <a:ext uri="{28A0092B-C50C-407E-A947-70E740481C1C}">
-                <a14:useLocalDpi xmlns:a14="http://schemas.microsoft.com/office/drawing/2010/main" val="0"/>
-              </a:ext>
-            </a:extLst>
-          </a:blip>
-          <a:stretch>
-            <a:fillRect/>
-          </a:stretch>
-        </p:blipFill>
-        <p:spPr>
-          <a:xfrm>
-            <a:off x="1451522" y="3698913"/>
-            <a:ext cx="1010697" cy="1010697"/>
-          </a:xfrm>
-          <a:prstGeom prst="rect">
-            <a:avLst/>
-          </a:prstGeom>
-        </p:spPr>
-      </p:pic>
-      <p:pic>
-        <p:nvPicPr>
-          <p:cNvPr id="31" name="Picture 30">
-            <a:extLst>
-              <a:ext uri="{FF2B5EF4-FFF2-40B4-BE49-F238E27FC236}">
-                <a16:creationId xmlns:a16="http://schemas.microsoft.com/office/drawing/2014/main" id="{4A48117C-AAFD-8301-B40D-56BC55725AA0}"/>
-              </a:ext>
-            </a:extLst>
-          </p:cNvPr>
-          <p:cNvPicPr>
-            <a:picLocks noChangeAspect="1"/>
-          </p:cNvPicPr>
-          <p:nvPr/>
-        </p:nvPicPr>
-        <p:blipFill>
-          <a:blip r:embed="rId4" cstate="print">
-            <a:extLst>
-              <a:ext uri="{28A0092B-C50C-407E-A947-70E740481C1C}">
-                <a14:useLocalDpi xmlns:a14="http://schemas.microsoft.com/office/drawing/2010/main" val="0"/>
-              </a:ext>
-            </a:extLst>
-          </a:blip>
-          <a:stretch>
-            <a:fillRect/>
-          </a:stretch>
-        </p:blipFill>
-        <p:spPr>
-          <a:xfrm>
-            <a:off x="1451521" y="2344473"/>
-            <a:ext cx="1010697" cy="1010697"/>
-          </a:xfrm>
-          <a:prstGeom prst="rect">
-            <a:avLst/>
-          </a:prstGeom>
-        </p:spPr>
-      </p:pic>
-      <p:pic>
-        <p:nvPicPr>
-          <p:cNvPr id="33" name="Picture 32">
-            <a:extLst>
-              <a:ext uri="{FF2B5EF4-FFF2-40B4-BE49-F238E27FC236}">
-                <a16:creationId xmlns:a16="http://schemas.microsoft.com/office/drawing/2014/main" id="{328DF4D8-EC80-FC82-9C22-0B653C30B9EB}"/>
-              </a:ext>
-            </a:extLst>
-          </p:cNvPr>
-          <p:cNvPicPr>
-            <a:picLocks noChangeAspect="1"/>
-          </p:cNvPicPr>
-          <p:nvPr/>
-        </p:nvPicPr>
-        <p:blipFill>
-          <a:blip r:embed="rId5" cstate="print">
-            <a:extLst>
-              <a:ext uri="{28A0092B-C50C-407E-A947-70E740481C1C}">
-                <a14:useLocalDpi xmlns:a14="http://schemas.microsoft.com/office/drawing/2010/main" val="0"/>
-              </a:ext>
-            </a:extLst>
-          </a:blip>
-          <a:stretch>
-            <a:fillRect/>
-          </a:stretch>
-        </p:blipFill>
-        <p:spPr>
-          <a:xfrm>
-            <a:off x="1196992" y="5014521"/>
-            <a:ext cx="1519756" cy="1010697"/>
-          </a:xfrm>
-          <a:prstGeom prst="rect">
-            <a:avLst/>
-          </a:prstGeom>
-        </p:spPr>
-      </p:pic>
-      <p:pic>
-        <p:nvPicPr>
-          <p:cNvPr id="35" name="Picture 34">
-            <a:extLst>
-              <a:ext uri="{FF2B5EF4-FFF2-40B4-BE49-F238E27FC236}">
-                <a16:creationId xmlns:a16="http://schemas.microsoft.com/office/drawing/2014/main" id="{62825CDA-6CF4-983F-0A8C-C929017A3B44}"/>
-              </a:ext>
-            </a:extLst>
-          </p:cNvPr>
-          <p:cNvPicPr>
-            <a:picLocks noChangeAspect="1"/>
-          </p:cNvPicPr>
-          <p:nvPr/>
-        </p:nvPicPr>
-        <p:blipFill>
-          <a:blip r:embed="rId6" cstate="print">
-            <a:extLst>
-              <a:ext uri="{28A0092B-C50C-407E-A947-70E740481C1C}">
-                <a14:useLocalDpi xmlns:a14="http://schemas.microsoft.com/office/drawing/2010/main" val="0"/>
-              </a:ext>
-            </a:extLst>
-          </a:blip>
-          <a:stretch>
-            <a:fillRect/>
-          </a:stretch>
-        </p:blipFill>
-        <p:spPr>
-          <a:xfrm>
-            <a:off x="6926635" y="1046257"/>
-            <a:ext cx="1010697" cy="1010697"/>
-          </a:xfrm>
-          <a:prstGeom prst="rect">
-            <a:avLst/>
-          </a:prstGeom>
-        </p:spPr>
-      </p:pic>
-      <p:pic>
-        <p:nvPicPr>
-          <p:cNvPr id="37" name="Picture 36">
-            <a:extLst>
-              <a:ext uri="{FF2B5EF4-FFF2-40B4-BE49-F238E27FC236}">
-                <a16:creationId xmlns:a16="http://schemas.microsoft.com/office/drawing/2014/main" id="{9817F2D1-7F55-08F2-2AA0-64A2B2DD71A7}"/>
-              </a:ext>
-            </a:extLst>
-          </p:cNvPr>
-          <p:cNvPicPr>
-            <a:picLocks noChangeAspect="1"/>
-          </p:cNvPicPr>
-          <p:nvPr/>
-        </p:nvPicPr>
-        <p:blipFill>
-          <a:blip r:embed="rId7" cstate="print">
-            <a:extLst>
-              <a:ext uri="{28A0092B-C50C-407E-A947-70E740481C1C}">
-                <a14:useLocalDpi xmlns:a14="http://schemas.microsoft.com/office/drawing/2010/main" val="0"/>
-              </a:ext>
-            </a:extLst>
-          </a:blip>
-          <a:stretch>
-            <a:fillRect/>
-          </a:stretch>
-        </p:blipFill>
-        <p:spPr>
-          <a:xfrm>
-            <a:off x="6926637" y="5014521"/>
-            <a:ext cx="1010697" cy="1010697"/>
-          </a:xfrm>
-          <a:prstGeom prst="rect">
-            <a:avLst/>
-          </a:prstGeom>
-        </p:spPr>
-      </p:pic>
-      <p:sp>
-        <p:nvSpPr>
-          <p:cNvPr id="40" name="Rectangle 39">
-            <a:extLst>
-              <a:ext uri="{FF2B5EF4-FFF2-40B4-BE49-F238E27FC236}">
-                <a16:creationId xmlns:a16="http://schemas.microsoft.com/office/drawing/2014/main" id="{01C3256C-13FA-1E95-99C2-C0C2586A05A2}"/>
-              </a:ext>
-            </a:extLst>
-          </p:cNvPr>
-          <p:cNvSpPr/>
-          <p:nvPr/>
-        </p:nvSpPr>
-        <p:spPr>
-          <a:xfrm>
-            <a:off x="2462219" y="2807647"/>
-            <a:ext cx="4531434" cy="646331"/>
-          </a:xfrm>
-          <a:prstGeom prst="rect">
-            <a:avLst/>
-          </a:prstGeom>
-        </p:spPr>
-        <p:txBody>
-          <a:bodyPr wrap="square">
-            <a:spAutoFit/>
-          </a:bodyPr>
-          <a:lstStyle/>
-          <a:p>
-            <a:r>
-              <a:rPr lang="el-GR" sz="1800" b="1" dirty="0"/>
-              <a:t>Αναπαράσταση ανθρώπινης συμπεριφοράς</a:t>
-            </a:r>
-            <a:endParaRPr lang="en-US" sz="1800" i="1" dirty="0"/>
-          </a:p>
-        </p:txBody>
-      </p:sp>
-      <p:sp>
-        <p:nvSpPr>
-          <p:cNvPr id="41" name="Rectangle 40">
-            <a:extLst>
-              <a:ext uri="{FF2B5EF4-FFF2-40B4-BE49-F238E27FC236}">
-                <a16:creationId xmlns:a16="http://schemas.microsoft.com/office/drawing/2014/main" id="{39E0F0F7-2F75-08B3-FEA3-E53E9FE6F674}"/>
-              </a:ext>
-            </a:extLst>
-          </p:cNvPr>
-          <p:cNvSpPr/>
-          <p:nvPr/>
-        </p:nvSpPr>
-        <p:spPr>
-          <a:xfrm>
-            <a:off x="2462219" y="4077846"/>
-            <a:ext cx="4632802" cy="646331"/>
-          </a:xfrm>
-          <a:prstGeom prst="rect">
-            <a:avLst/>
-          </a:prstGeom>
-        </p:spPr>
-        <p:txBody>
-          <a:bodyPr wrap="square">
-            <a:spAutoFit/>
-          </a:bodyPr>
-          <a:lstStyle/>
-          <a:p>
-            <a:r>
-              <a:rPr lang="el-GR" sz="1800" b="1" dirty="0"/>
-              <a:t>Είδη κινδύνου στη βιομηχανία και υδρόθειο</a:t>
-            </a:r>
-            <a:endParaRPr lang="en-US" sz="1800" i="1" dirty="0"/>
-          </a:p>
-        </p:txBody>
-      </p:sp>
-      <p:sp>
-        <p:nvSpPr>
-          <p:cNvPr id="42" name="Rectangle 41">
-            <a:extLst>
-              <a:ext uri="{FF2B5EF4-FFF2-40B4-BE49-F238E27FC236}">
-                <a16:creationId xmlns:a16="http://schemas.microsoft.com/office/drawing/2014/main" id="{C9DA5C62-CEF6-0F45-18E5-AED6EDDDBC1C}"/>
-              </a:ext>
-            </a:extLst>
-          </p:cNvPr>
-          <p:cNvSpPr/>
-          <p:nvPr/>
-        </p:nvSpPr>
-        <p:spPr>
-          <a:xfrm>
-            <a:off x="2462219" y="5448330"/>
-            <a:ext cx="4209886" cy="646331"/>
-          </a:xfrm>
-          <a:prstGeom prst="rect">
-            <a:avLst/>
-          </a:prstGeom>
-        </p:spPr>
-        <p:txBody>
-          <a:bodyPr wrap="square">
-            <a:spAutoFit/>
-          </a:bodyPr>
-          <a:lstStyle/>
-          <a:p>
-            <a:r>
-              <a:rPr lang="el-GR" sz="1800" b="1" dirty="0"/>
-              <a:t>Επίδραση του κινδύνου στην εκκένωση</a:t>
-            </a:r>
-            <a:endParaRPr lang="en-US" sz="1800" i="1" dirty="0"/>
-          </a:p>
-        </p:txBody>
-      </p:sp>
-      <p:sp>
-        <p:nvSpPr>
-          <p:cNvPr id="46" name="Rectangle 45">
-            <a:extLst>
-              <a:ext uri="{FF2B5EF4-FFF2-40B4-BE49-F238E27FC236}">
-                <a16:creationId xmlns:a16="http://schemas.microsoft.com/office/drawing/2014/main" id="{68EB3DE5-48CB-5266-29E5-B34DC5FED9EB}"/>
-              </a:ext>
-            </a:extLst>
-          </p:cNvPr>
-          <p:cNvSpPr/>
-          <p:nvPr/>
-        </p:nvSpPr>
-        <p:spPr>
-          <a:xfrm>
-            <a:off x="7937332" y="1372110"/>
-            <a:ext cx="4762546" cy="369332"/>
-          </a:xfrm>
-          <a:prstGeom prst="rect">
-            <a:avLst/>
-          </a:prstGeom>
-        </p:spPr>
-        <p:txBody>
-          <a:bodyPr wrap="square">
-            <a:spAutoFit/>
-          </a:bodyPr>
-          <a:lstStyle/>
-          <a:p>
-            <a:r>
-              <a:rPr lang="el-GR" sz="1800" b="1" dirty="0"/>
-              <a:t>Αλγόριθμοι εύρεσης διαδρομής</a:t>
-            </a:r>
-            <a:endParaRPr lang="en-US" sz="1800" i="1" dirty="0"/>
-          </a:p>
-        </p:txBody>
-      </p:sp>
-      <p:sp>
-        <p:nvSpPr>
-          <p:cNvPr id="48" name="Rectangle 47">
-            <a:extLst>
-              <a:ext uri="{FF2B5EF4-FFF2-40B4-BE49-F238E27FC236}">
-                <a16:creationId xmlns:a16="http://schemas.microsoft.com/office/drawing/2014/main" id="{79EB71DE-17B5-DD99-9D34-6D0912374C51}"/>
-              </a:ext>
-            </a:extLst>
-          </p:cNvPr>
-          <p:cNvSpPr/>
-          <p:nvPr/>
-        </p:nvSpPr>
-        <p:spPr>
-          <a:xfrm>
-            <a:off x="7937332" y="4087562"/>
-            <a:ext cx="4762546" cy="369332"/>
-          </a:xfrm>
-          <a:prstGeom prst="rect">
-            <a:avLst/>
-          </a:prstGeom>
-        </p:spPr>
-        <p:txBody>
-          <a:bodyPr wrap="square">
-            <a:spAutoFit/>
-          </a:bodyPr>
-          <a:lstStyle/>
-          <a:p>
-            <a:r>
-              <a:rPr lang="el-GR" sz="1800" b="1" dirty="0"/>
-              <a:t>Περίπτωση μελέτης</a:t>
-            </a:r>
-            <a:endParaRPr lang="en-US" sz="1800" i="1" dirty="0"/>
-          </a:p>
-        </p:txBody>
-      </p:sp>
-      <p:sp>
-        <p:nvSpPr>
-          <p:cNvPr id="49" name="Rectangle 48">
-            <a:extLst>
-              <a:ext uri="{FF2B5EF4-FFF2-40B4-BE49-F238E27FC236}">
-                <a16:creationId xmlns:a16="http://schemas.microsoft.com/office/drawing/2014/main" id="{10130989-8076-AD26-B4DF-B06321C6C67E}"/>
-              </a:ext>
-            </a:extLst>
-          </p:cNvPr>
-          <p:cNvSpPr/>
-          <p:nvPr/>
-        </p:nvSpPr>
-        <p:spPr>
-          <a:xfrm>
-            <a:off x="7937332" y="5458046"/>
-            <a:ext cx="4762546" cy="369332"/>
-          </a:xfrm>
-          <a:prstGeom prst="rect">
-            <a:avLst/>
-          </a:prstGeom>
-        </p:spPr>
-        <p:txBody>
-          <a:bodyPr wrap="square">
-            <a:spAutoFit/>
-          </a:bodyPr>
-          <a:lstStyle/>
-          <a:p>
-            <a:r>
-              <a:rPr lang="el-GR" sz="1800" b="1" dirty="0"/>
-              <a:t>Αποτελέσματα</a:t>
-            </a:r>
-            <a:endParaRPr lang="en-US" sz="1800" i="1" dirty="0"/>
-          </a:p>
-        </p:txBody>
-      </p:sp>
-      <p:pic>
-        <p:nvPicPr>
-          <p:cNvPr id="51" name="Picture 50">
-            <a:extLst>
-              <a:ext uri="{FF2B5EF4-FFF2-40B4-BE49-F238E27FC236}">
-                <a16:creationId xmlns:a16="http://schemas.microsoft.com/office/drawing/2014/main" id="{AC305DC1-C0EC-6E0F-1D11-EFDCDB8990DA}"/>
-              </a:ext>
-            </a:extLst>
-          </p:cNvPr>
-          <p:cNvPicPr>
-            <a:picLocks noChangeAspect="1"/>
-          </p:cNvPicPr>
-          <p:nvPr/>
-        </p:nvPicPr>
-        <p:blipFill>
-          <a:blip r:embed="rId8" cstate="print">
-            <a:extLst>
-              <a:ext uri="{28A0092B-C50C-407E-A947-70E740481C1C}">
-                <a14:useLocalDpi xmlns:a14="http://schemas.microsoft.com/office/drawing/2010/main" val="0"/>
-              </a:ext>
-            </a:extLst>
-          </a:blip>
-          <a:stretch>
-            <a:fillRect/>
-          </a:stretch>
-        </p:blipFill>
-        <p:spPr>
-          <a:xfrm>
-            <a:off x="1451520" y="1046257"/>
-            <a:ext cx="1010697" cy="1010697"/>
-          </a:xfrm>
-          <a:prstGeom prst="rect">
-            <a:avLst/>
-          </a:prstGeom>
-        </p:spPr>
-      </p:pic>
-      <p:sp>
-        <p:nvSpPr>
-          <p:cNvPr id="52" name="Rectangle 51">
-            <a:extLst>
-              <a:ext uri="{FF2B5EF4-FFF2-40B4-BE49-F238E27FC236}">
-                <a16:creationId xmlns:a16="http://schemas.microsoft.com/office/drawing/2014/main" id="{69A45EF7-C8DD-E25A-0ED1-2569A7603A53}"/>
-              </a:ext>
-            </a:extLst>
-          </p:cNvPr>
-          <p:cNvSpPr/>
-          <p:nvPr/>
-        </p:nvSpPr>
-        <p:spPr>
-          <a:xfrm>
-            <a:off x="2462219" y="1362394"/>
-            <a:ext cx="4762546" cy="369332"/>
-          </a:xfrm>
-          <a:prstGeom prst="rect">
-            <a:avLst/>
-          </a:prstGeom>
-        </p:spPr>
-        <p:txBody>
-          <a:bodyPr wrap="square">
-            <a:spAutoFit/>
-          </a:bodyPr>
-          <a:lstStyle/>
-          <a:p>
-            <a:r>
-              <a:rPr lang="el-GR" sz="1800" b="1" dirty="0"/>
-              <a:t>Τι υπάρχει σήμερα</a:t>
-            </a:r>
-            <a:endParaRPr lang="en-US" sz="1800" i="1" dirty="0"/>
-          </a:p>
-        </p:txBody>
-      </p:sp>
-      <p:pic>
-        <p:nvPicPr>
-          <p:cNvPr id="55" name="Picture 54">
-            <a:extLst>
-              <a:ext uri="{FF2B5EF4-FFF2-40B4-BE49-F238E27FC236}">
-                <a16:creationId xmlns:a16="http://schemas.microsoft.com/office/drawing/2014/main" id="{3DDBC42C-FD5C-B609-69BB-8CC7E3643FF3}"/>
-              </a:ext>
-            </a:extLst>
-          </p:cNvPr>
-          <p:cNvPicPr>
-            <a:picLocks noChangeAspect="1"/>
-          </p:cNvPicPr>
-          <p:nvPr/>
-        </p:nvPicPr>
-        <p:blipFill>
-          <a:blip r:embed="rId9" cstate="print">
-            <a:extLst>
-              <a:ext uri="{28A0092B-C50C-407E-A947-70E740481C1C}">
-                <a14:useLocalDpi xmlns:a14="http://schemas.microsoft.com/office/drawing/2010/main" val="0"/>
-              </a:ext>
-            </a:extLst>
-          </a:blip>
-          <a:stretch>
-            <a:fillRect/>
-          </a:stretch>
-        </p:blipFill>
-        <p:spPr>
-          <a:xfrm>
-            <a:off x="6926635" y="2445835"/>
-            <a:ext cx="1010697" cy="1010697"/>
-          </a:xfrm>
-          <a:prstGeom prst="rect">
-            <a:avLst/>
-          </a:prstGeom>
-        </p:spPr>
-      </p:pic>
-      <p:sp>
-        <p:nvSpPr>
-          <p:cNvPr id="57" name="Rectangle 56">
-            <a:extLst>
-              <a:ext uri="{FF2B5EF4-FFF2-40B4-BE49-F238E27FC236}">
-                <a16:creationId xmlns:a16="http://schemas.microsoft.com/office/drawing/2014/main" id="{B3CD80CC-C07E-58C9-D1B1-93BFDD38E8D9}"/>
-              </a:ext>
-            </a:extLst>
-          </p:cNvPr>
-          <p:cNvSpPr/>
-          <p:nvPr/>
-        </p:nvSpPr>
-        <p:spPr>
-          <a:xfrm>
-            <a:off x="7937332" y="2776233"/>
-            <a:ext cx="4762546" cy="369332"/>
-          </a:xfrm>
-          <a:prstGeom prst="rect">
-            <a:avLst/>
-          </a:prstGeom>
-        </p:spPr>
-        <p:txBody>
-          <a:bodyPr wrap="square">
-            <a:spAutoFit/>
-          </a:bodyPr>
-          <a:lstStyle/>
-          <a:p>
-            <a:r>
-              <a:rPr lang="en-US" sz="1800" b="1" dirty="0"/>
-              <a:t>Julia </a:t>
-            </a:r>
-            <a:r>
-              <a:rPr lang="el-GR" sz="1800" b="1" dirty="0"/>
-              <a:t>ως περιβάλλον προσομοίωσης </a:t>
-            </a:r>
-            <a:endParaRPr lang="en-US" sz="1800" i="1" dirty="0"/>
-          </a:p>
-        </p:txBody>
-      </p:sp>
-    </p:spTree>
-    <p:extLst>
-      <p:ext uri="{BB962C8B-B14F-4D97-AF65-F5344CB8AC3E}">
-        <p14:creationId xmlns:p14="http://schemas.microsoft.com/office/powerpoint/2010/main" val="2865516353"/>
-      </p:ext>
-    </p:extLst>
-  </p:cSld>
-  <p:clrMapOvr>
-    <a:masterClrMapping/>
-  </p:clrMapOvr>
-  <mc:AlternateContent xmlns:mc="http://schemas.openxmlformats.org/markup-compatibility/2006">
-    <mc:Choice xmlns:p159="http://schemas.microsoft.com/office/powerpoint/2015/09/main" Requires="p159">
-      <p:transition xmlns:p14="http://schemas.microsoft.com/office/powerpoint/2010/main" spd="slow" p14:dur="2000">
-        <p159:morph option="byObject"/>
-      </p:transition>
-    </mc:Choice>
-    <mc:Fallback>
-      <p:transition spd="slow">
-        <p:fade/>
-      </p:transition>
-    </mc:Fallback>
-  </mc:AlternateContent>
-</p:sld>
-</file>
-
-<file path=ppt/slides/slide3.xml><?xml version="1.0" encoding="utf-8"?>
+<file path=ppt/slides/slide10.xml><?xml version="1.0" encoding="utf-8"?>
 <p:sld xmlns:a="http://schemas.openxmlformats.org/drawingml/2006/main" xmlns:r="http://schemas.openxmlformats.org/officeDocument/2006/relationships" xmlns:p="http://schemas.openxmlformats.org/presentationml/2006/main">
   <p:cSld>
     <p:spTree>
@@ -10017,7 +9357,7 @@
           <p:cNvPr id="2" name="Slide Number Placeholder 1">
             <a:extLst>
               <a:ext uri="{FF2B5EF4-FFF2-40B4-BE49-F238E27FC236}">
-                <a16:creationId xmlns:a16="http://schemas.microsoft.com/office/drawing/2014/main" id="{E3500431-1201-AA39-A8CA-2E83706ECFA8}"/>
+                <a16:creationId xmlns:a16="http://schemas.microsoft.com/office/drawing/2014/main" id="{45938C33-72E5-D8E3-8CB8-261D023B796E}"/>
               </a:ext>
             </a:extLst>
           </p:cNvPr>
@@ -10036,7 +9376,7 @@
             <a:fld id="{3490C777-6B35-47B1-993A-7400E925DBDB}" type="slidenum">
               <a:rPr lang="en-US" smtClean="0"/>
               <a:pPr/>
-              <a:t>3</a:t>
+              <a:t>10</a:t>
             </a:fld>
             <a:endParaRPr lang="en-US" dirty="0">
               <a:latin typeface="Aptos" panose="020B0004020202020204" pitchFamily="34" charset="0"/>
@@ -10049,7 +9389,7 @@
           <p:cNvPr id="3" name="Title 2">
             <a:extLst>
               <a:ext uri="{FF2B5EF4-FFF2-40B4-BE49-F238E27FC236}">
-                <a16:creationId xmlns:a16="http://schemas.microsoft.com/office/drawing/2014/main" id="{3341B4B9-540E-A42F-4695-3FFC70D946C0}"/>
+                <a16:creationId xmlns:a16="http://schemas.microsoft.com/office/drawing/2014/main" id="{C2E81EBF-F510-5D42-74F6-22B9B51453B0}"/>
               </a:ext>
             </a:extLst>
           </p:cNvPr>
@@ -10067,7 +9407,7 @@
           <a:p>
             <a:r>
               <a:rPr lang="el-GR" dirty="0"/>
-              <a:t>Βιβλιογραφία και κενά</a:t>
+              <a:t>Αλγόριθμοι εύρεσης διαδρομής</a:t>
             </a:r>
           </a:p>
         </p:txBody>
@@ -10077,7 +9417,7 @@
           <p:cNvPr id="4" name="Text Placeholder 3">
             <a:extLst>
               <a:ext uri="{FF2B5EF4-FFF2-40B4-BE49-F238E27FC236}">
-                <a16:creationId xmlns:a16="http://schemas.microsoft.com/office/drawing/2014/main" id="{4D568BD1-AF93-3AF4-CC23-B225F41857DF}"/>
+                <a16:creationId xmlns:a16="http://schemas.microsoft.com/office/drawing/2014/main" id="{85C39256-ED25-F9B2-24CC-CB4EFF8A71AF}"/>
               </a:ext>
             </a:extLst>
           </p:cNvPr>
@@ -10093,14 +9433,14 @@
           <a:bodyPr/>
           <a:lstStyle/>
           <a:p>
-            <a:endParaRPr lang="el-GR" dirty="0"/>
+            <a:endParaRPr lang="el-GR"/>
           </a:p>
         </p:txBody>
       </p:sp>
     </p:spTree>
     <p:extLst>
       <p:ext uri="{BB962C8B-B14F-4D97-AF65-F5344CB8AC3E}">
-        <p14:creationId xmlns:p14="http://schemas.microsoft.com/office/powerpoint/2010/main" val="40660042"/>
+        <p14:creationId xmlns:p14="http://schemas.microsoft.com/office/powerpoint/2010/main" val="2400925355"/>
       </p:ext>
     </p:extLst>
   </p:cSld>
@@ -10110,7 +9450,249 @@
 </p:sld>
 </file>
 
-<file path=ppt/slides/slide4.xml><?xml version="1.0" encoding="utf-8"?>
+<file path=ppt/slides/slide11.xml><?xml version="1.0" encoding="utf-8"?>
+<p:sld xmlns:a="http://schemas.openxmlformats.org/drawingml/2006/main" xmlns:r="http://schemas.openxmlformats.org/officeDocument/2006/relationships" xmlns:p="http://schemas.openxmlformats.org/presentationml/2006/main">
+  <p:cSld>
+    <p:spTree>
+      <p:nvGrpSpPr>
+        <p:cNvPr id="1" name="">
+          <a:extLst>
+            <a:ext uri="{FF2B5EF4-FFF2-40B4-BE49-F238E27FC236}">
+              <a16:creationId xmlns:a16="http://schemas.microsoft.com/office/drawing/2014/main" id="{C3AC02D5-AD77-7A44-0331-61E6E8386059}"/>
+            </a:ext>
+          </a:extLst>
+        </p:cNvPr>
+        <p:cNvGrpSpPr/>
+        <p:nvPr/>
+      </p:nvGrpSpPr>
+      <p:grpSpPr>
+        <a:xfrm>
+          <a:off x="0" y="0"/>
+          <a:ext cx="0" cy="0"/>
+          <a:chOff x="0" y="0"/>
+          <a:chExt cx="0" cy="0"/>
+        </a:xfrm>
+      </p:grpSpPr>
+      <p:sp>
+        <p:nvSpPr>
+          <p:cNvPr id="2" name="Slide Number Placeholder 1">
+            <a:extLst>
+              <a:ext uri="{FF2B5EF4-FFF2-40B4-BE49-F238E27FC236}">
+                <a16:creationId xmlns:a16="http://schemas.microsoft.com/office/drawing/2014/main" id="{1F467607-2C9E-3A5F-D331-695D3D1571E9}"/>
+              </a:ext>
+            </a:extLst>
+          </p:cNvPr>
+          <p:cNvSpPr>
+            <a:spLocks noGrp="1"/>
+          </p:cNvSpPr>
+          <p:nvPr>
+            <p:ph type="sldNum" sz="quarter" idx="4"/>
+          </p:nvPr>
+        </p:nvSpPr>
+        <p:spPr/>
+        <p:txBody>
+          <a:bodyPr/>
+          <a:lstStyle/>
+          <a:p>
+            <a:fld id="{3490C777-6B35-47B1-993A-7400E925DBDB}" type="slidenum">
+              <a:rPr lang="en-US" smtClean="0"/>
+              <a:pPr/>
+              <a:t>11</a:t>
+            </a:fld>
+            <a:endParaRPr lang="en-US" dirty="0">
+              <a:latin typeface="Aptos" panose="020B0004020202020204" pitchFamily="34" charset="0"/>
+            </a:endParaRPr>
+          </a:p>
+        </p:txBody>
+      </p:sp>
+      <p:sp>
+        <p:nvSpPr>
+          <p:cNvPr id="3" name="Title 2">
+            <a:extLst>
+              <a:ext uri="{FF2B5EF4-FFF2-40B4-BE49-F238E27FC236}">
+                <a16:creationId xmlns:a16="http://schemas.microsoft.com/office/drawing/2014/main" id="{F82482CB-3689-233A-8E64-F83C969727D5}"/>
+              </a:ext>
+            </a:extLst>
+          </p:cNvPr>
+          <p:cNvSpPr>
+            <a:spLocks noGrp="1"/>
+          </p:cNvSpPr>
+          <p:nvPr>
+            <p:ph type="title"/>
+          </p:nvPr>
+        </p:nvSpPr>
+        <p:spPr/>
+        <p:txBody>
+          <a:bodyPr/>
+          <a:lstStyle/>
+          <a:p>
+            <a:r>
+              <a:rPr lang="el-GR" dirty="0"/>
+              <a:t>Αλγόριθμοι εύρεσης διαδρομής</a:t>
+            </a:r>
+          </a:p>
+        </p:txBody>
+      </p:sp>
+      <p:sp>
+        <p:nvSpPr>
+          <p:cNvPr id="4" name="Text Placeholder 3">
+            <a:extLst>
+              <a:ext uri="{FF2B5EF4-FFF2-40B4-BE49-F238E27FC236}">
+                <a16:creationId xmlns:a16="http://schemas.microsoft.com/office/drawing/2014/main" id="{28247A6B-E4D4-C5C4-A1C1-6350E734435B}"/>
+              </a:ext>
+            </a:extLst>
+          </p:cNvPr>
+          <p:cNvSpPr>
+            <a:spLocks noGrp="1"/>
+          </p:cNvSpPr>
+          <p:nvPr>
+            <p:ph type="body" sz="quarter" idx="10"/>
+          </p:nvPr>
+        </p:nvSpPr>
+        <p:spPr/>
+        <p:txBody>
+          <a:bodyPr/>
+          <a:lstStyle/>
+          <a:p>
+            <a:endParaRPr lang="el-GR"/>
+          </a:p>
+        </p:txBody>
+      </p:sp>
+    </p:spTree>
+    <p:extLst>
+      <p:ext uri="{BB962C8B-B14F-4D97-AF65-F5344CB8AC3E}">
+        <p14:creationId xmlns:p14="http://schemas.microsoft.com/office/powerpoint/2010/main" val="1914221637"/>
+      </p:ext>
+    </p:extLst>
+  </p:cSld>
+  <p:clrMapOvr>
+    <a:masterClrMapping/>
+  </p:clrMapOvr>
+</p:sld>
+</file>
+
+<file path=ppt/slides/slide12.xml><?xml version="1.0" encoding="utf-8"?>
+<p:sld xmlns:a="http://schemas.openxmlformats.org/drawingml/2006/main" xmlns:r="http://schemas.openxmlformats.org/officeDocument/2006/relationships" xmlns:p="http://schemas.openxmlformats.org/presentationml/2006/main">
+  <p:cSld>
+    <p:spTree>
+      <p:nvGrpSpPr>
+        <p:cNvPr id="1" name="">
+          <a:extLst>
+            <a:ext uri="{FF2B5EF4-FFF2-40B4-BE49-F238E27FC236}">
+              <a16:creationId xmlns:a16="http://schemas.microsoft.com/office/drawing/2014/main" id="{59D6F023-BB45-B20F-BCE8-FAD6FCE75C77}"/>
+            </a:ext>
+          </a:extLst>
+        </p:cNvPr>
+        <p:cNvGrpSpPr/>
+        <p:nvPr/>
+      </p:nvGrpSpPr>
+      <p:grpSpPr>
+        <a:xfrm>
+          <a:off x="0" y="0"/>
+          <a:ext cx="0" cy="0"/>
+          <a:chOff x="0" y="0"/>
+          <a:chExt cx="0" cy="0"/>
+        </a:xfrm>
+      </p:grpSpPr>
+      <p:sp>
+        <p:nvSpPr>
+          <p:cNvPr id="2" name="Slide Number Placeholder 1">
+            <a:extLst>
+              <a:ext uri="{FF2B5EF4-FFF2-40B4-BE49-F238E27FC236}">
+                <a16:creationId xmlns:a16="http://schemas.microsoft.com/office/drawing/2014/main" id="{6209F635-E1A0-C1D6-8999-E96256A9BC10}"/>
+              </a:ext>
+            </a:extLst>
+          </p:cNvPr>
+          <p:cNvSpPr>
+            <a:spLocks noGrp="1"/>
+          </p:cNvSpPr>
+          <p:nvPr>
+            <p:ph type="sldNum" sz="quarter" idx="4"/>
+          </p:nvPr>
+        </p:nvSpPr>
+        <p:spPr/>
+        <p:txBody>
+          <a:bodyPr/>
+          <a:lstStyle/>
+          <a:p>
+            <a:fld id="{3490C777-6B35-47B1-993A-7400E925DBDB}" type="slidenum">
+              <a:rPr lang="en-US" smtClean="0"/>
+              <a:pPr/>
+              <a:t>12</a:t>
+            </a:fld>
+            <a:endParaRPr lang="en-US" dirty="0">
+              <a:latin typeface="Aptos" panose="020B0004020202020204" pitchFamily="34" charset="0"/>
+            </a:endParaRPr>
+          </a:p>
+        </p:txBody>
+      </p:sp>
+      <p:sp>
+        <p:nvSpPr>
+          <p:cNvPr id="3" name="Title 2">
+            <a:extLst>
+              <a:ext uri="{FF2B5EF4-FFF2-40B4-BE49-F238E27FC236}">
+                <a16:creationId xmlns:a16="http://schemas.microsoft.com/office/drawing/2014/main" id="{E69B3BC4-2B65-8478-FF57-9B85EDBF7781}"/>
+              </a:ext>
+            </a:extLst>
+          </p:cNvPr>
+          <p:cNvSpPr>
+            <a:spLocks noGrp="1"/>
+          </p:cNvSpPr>
+          <p:nvPr>
+            <p:ph type="title"/>
+          </p:nvPr>
+        </p:nvSpPr>
+        <p:spPr/>
+        <p:txBody>
+          <a:bodyPr/>
+          <a:lstStyle/>
+          <a:p>
+            <a:r>
+              <a:rPr lang="el-GR" dirty="0"/>
+              <a:t>Αλγόριθμοι εύρεσης διαδρομής</a:t>
+            </a:r>
+          </a:p>
+        </p:txBody>
+      </p:sp>
+      <p:sp>
+        <p:nvSpPr>
+          <p:cNvPr id="4" name="Text Placeholder 3">
+            <a:extLst>
+              <a:ext uri="{FF2B5EF4-FFF2-40B4-BE49-F238E27FC236}">
+                <a16:creationId xmlns:a16="http://schemas.microsoft.com/office/drawing/2014/main" id="{0E745750-1F62-E929-B68B-03403C13222B}"/>
+              </a:ext>
+            </a:extLst>
+          </p:cNvPr>
+          <p:cNvSpPr>
+            <a:spLocks noGrp="1"/>
+          </p:cNvSpPr>
+          <p:nvPr>
+            <p:ph type="body" sz="quarter" idx="10"/>
+          </p:nvPr>
+        </p:nvSpPr>
+        <p:spPr/>
+        <p:txBody>
+          <a:bodyPr/>
+          <a:lstStyle/>
+          <a:p>
+            <a:endParaRPr lang="el-GR"/>
+          </a:p>
+        </p:txBody>
+      </p:sp>
+    </p:spTree>
+    <p:extLst>
+      <p:ext uri="{BB962C8B-B14F-4D97-AF65-F5344CB8AC3E}">
+        <p14:creationId xmlns:p14="http://schemas.microsoft.com/office/powerpoint/2010/main" val="2515566366"/>
+      </p:ext>
+    </p:extLst>
+  </p:cSld>
+  <p:clrMapOvr>
+    <a:masterClrMapping/>
+  </p:clrMapOvr>
+</p:sld>
+</file>
+
+<file path=ppt/slides/slide13.xml><?xml version="1.0" encoding="utf-8"?>
 <p:sld xmlns:a="http://schemas.openxmlformats.org/drawingml/2006/main" xmlns:r="http://schemas.openxmlformats.org/officeDocument/2006/relationships" xmlns:p="http://schemas.openxmlformats.org/presentationml/2006/main">
   <p:cSld>
     <p:spTree>
@@ -10129,10 +9711,10 @@
       </p:grpSpPr>
       <p:sp>
         <p:nvSpPr>
-          <p:cNvPr id="4" name="Slide Number Placeholder 3">
-            <a:extLst>
-              <a:ext uri="{FF2B5EF4-FFF2-40B4-BE49-F238E27FC236}">
-                <a16:creationId xmlns:a16="http://schemas.microsoft.com/office/drawing/2014/main" id="{8D3BE9A9-9DF4-A7D9-9689-05488E6D945E}"/>
+          <p:cNvPr id="2" name="Slide Number Placeholder 1">
+            <a:extLst>
+              <a:ext uri="{FF2B5EF4-FFF2-40B4-BE49-F238E27FC236}">
+                <a16:creationId xmlns:a16="http://schemas.microsoft.com/office/drawing/2014/main" id="{E8E8CC4D-F406-1860-7A1E-5A6B32A67552}"/>
               </a:ext>
             </a:extLst>
           </p:cNvPr>
@@ -10151,7 +9733,7 @@
             <a:fld id="{3490C777-6B35-47B1-993A-7400E925DBDB}" type="slidenum">
               <a:rPr lang="en-US" smtClean="0"/>
               <a:pPr/>
-              <a:t>4</a:t>
+              <a:t>13</a:t>
             </a:fld>
             <a:endParaRPr lang="en-US" dirty="0">
               <a:latin typeface="Aptos" panose="020B0004020202020204" pitchFamily="34" charset="0"/>
@@ -10161,10 +9743,10 @@
       </p:sp>
       <p:sp>
         <p:nvSpPr>
-          <p:cNvPr id="5" name="Title 4">
-            <a:extLst>
-              <a:ext uri="{FF2B5EF4-FFF2-40B4-BE49-F238E27FC236}">
-                <a16:creationId xmlns:a16="http://schemas.microsoft.com/office/drawing/2014/main" id="{D91B6731-B372-3B98-47B9-32785EEFB137}"/>
+          <p:cNvPr id="3" name="Title 2">
+            <a:extLst>
+              <a:ext uri="{FF2B5EF4-FFF2-40B4-BE49-F238E27FC236}">
+                <a16:creationId xmlns:a16="http://schemas.microsoft.com/office/drawing/2014/main" id="{93762800-408A-A215-9011-C0FDDC0F2ED9}"/>
               </a:ext>
             </a:extLst>
           </p:cNvPr>
@@ -10182,17 +9764,21 @@
           <a:p>
             <a:r>
               <a:rPr lang="en-US" dirty="0"/>
-              <a:t>overview</a:t>
+              <a:t>Julia </a:t>
+            </a:r>
+            <a:r>
+              <a:rPr lang="el-GR" dirty="0"/>
+              <a:t>ως περιβάλλον προσομοίωσης</a:t>
             </a:r>
           </a:p>
         </p:txBody>
       </p:sp>
       <p:sp>
         <p:nvSpPr>
-          <p:cNvPr id="2" name="Text Placeholder 1">
-            <a:extLst>
-              <a:ext uri="{FF2B5EF4-FFF2-40B4-BE49-F238E27FC236}">
-                <a16:creationId xmlns:a16="http://schemas.microsoft.com/office/drawing/2014/main" id="{DA2C4C23-99B0-0527-D882-3E9E43FF992C}"/>
+          <p:cNvPr id="4" name="Text Placeholder 3">
+            <a:extLst>
+              <a:ext uri="{FF2B5EF4-FFF2-40B4-BE49-F238E27FC236}">
+                <a16:creationId xmlns:a16="http://schemas.microsoft.com/office/drawing/2014/main" id="{797A1B35-EB1E-5CB0-9DB5-9C9646DEFADB}"/>
               </a:ext>
             </a:extLst>
           </p:cNvPr>
@@ -10215,29 +9801,17 @@
     </p:spTree>
     <p:extLst>
       <p:ext uri="{BB962C8B-B14F-4D97-AF65-F5344CB8AC3E}">
-        <p14:creationId xmlns:p14="http://schemas.microsoft.com/office/powerpoint/2010/main" val="2640457324"/>
+        <p14:creationId xmlns:p14="http://schemas.microsoft.com/office/powerpoint/2010/main" val="2190363684"/>
       </p:ext>
     </p:extLst>
   </p:cSld>
   <p:clrMapOvr>
     <a:masterClrMapping/>
   </p:clrMapOvr>
-  <mc:AlternateContent xmlns:mc="http://schemas.openxmlformats.org/markup-compatibility/2006" xmlns:p159="http://schemas.microsoft.com/office/powerpoint/2015/09/main">
-    <mc:Choice Requires="p159">
-      <p:transition xmlns:p14="http://schemas.microsoft.com/office/powerpoint/2010/main" spd="slow" p14:dur="2000">
-        <p159:morph option="byObject"/>
-      </p:transition>
-    </mc:Choice>
-    <mc:Fallback xmlns="">
-      <p:transition spd="slow">
-        <p:fade/>
-      </p:transition>
-    </mc:Fallback>
-  </mc:AlternateContent>
 </p:sld>
 </file>
 
-<file path=ppt/slides/slide5.xml><?xml version="1.0" encoding="utf-8"?>
+<file path=ppt/slides/slide14.xml><?xml version="1.0" encoding="utf-8"?>
 <p:sld xmlns:a="http://schemas.openxmlformats.org/drawingml/2006/main" xmlns:r="http://schemas.openxmlformats.org/officeDocument/2006/relationships" xmlns:p="http://schemas.openxmlformats.org/presentationml/2006/main">
   <p:cSld>
     <p:spTree>
@@ -10684,7 +10258,7 @@
                 <a:tabLst/>
                 <a:defRPr/>
               </a:pPr>
-              <a:t>5</a:t>
+              <a:t>14</a:t>
             </a:fld>
             <a:endParaRPr kumimoji="0" lang="en-US" sz="1400" b="1" i="0" u="none" strike="noStrike" kern="1200" cap="none" spc="0" normalizeH="0" baseline="0" noProof="0" dirty="0">
               <a:ln>
@@ -12822,6 +12396,1492 @@
       <p:bldP spid="15" grpId="0" animBg="1"/>
     </p:bldLst>
   </p:timing>
+</p:sld>
+</file>
+
+<file path=ppt/slides/slide2.xml><?xml version="1.0" encoding="utf-8"?>
+<p:sld xmlns:a="http://schemas.openxmlformats.org/drawingml/2006/main" xmlns:r="http://schemas.openxmlformats.org/officeDocument/2006/relationships" xmlns:p="http://schemas.openxmlformats.org/presentationml/2006/main">
+  <p:cSld>
+    <p:spTree>
+      <p:nvGrpSpPr>
+        <p:cNvPr id="1" name=""/>
+        <p:cNvGrpSpPr/>
+        <p:nvPr/>
+      </p:nvGrpSpPr>
+      <p:grpSpPr>
+        <a:xfrm>
+          <a:off x="0" y="0"/>
+          <a:ext cx="0" cy="0"/>
+          <a:chOff x="0" y="0"/>
+          <a:chExt cx="0" cy="0"/>
+        </a:xfrm>
+      </p:grpSpPr>
+      <p:sp>
+        <p:nvSpPr>
+          <p:cNvPr id="2" name="Slide Number Placeholder 1">
+            <a:extLst>
+              <a:ext uri="{FF2B5EF4-FFF2-40B4-BE49-F238E27FC236}">
+                <a16:creationId xmlns:a16="http://schemas.microsoft.com/office/drawing/2014/main" id="{B6F4E934-FA20-4275-186E-C4BAE8709893}"/>
+              </a:ext>
+            </a:extLst>
+          </p:cNvPr>
+          <p:cNvSpPr>
+            <a:spLocks noGrp="1"/>
+          </p:cNvSpPr>
+          <p:nvPr>
+            <p:ph type="sldNum" sz="quarter" idx="4"/>
+          </p:nvPr>
+        </p:nvSpPr>
+        <p:spPr/>
+        <p:txBody>
+          <a:bodyPr/>
+          <a:lstStyle/>
+          <a:p>
+            <a:fld id="{3490C777-6B35-47B1-993A-7400E925DBDB}" type="slidenum">
+              <a:rPr lang="en-US" smtClean="0"/>
+              <a:pPr/>
+              <a:t>2</a:t>
+            </a:fld>
+            <a:endParaRPr lang="en-US" dirty="0">
+              <a:latin typeface="Aptos" panose="020B0004020202020204" pitchFamily="34" charset="0"/>
+            </a:endParaRPr>
+          </a:p>
+        </p:txBody>
+      </p:sp>
+      <p:sp>
+        <p:nvSpPr>
+          <p:cNvPr id="3" name="Title 2">
+            <a:extLst>
+              <a:ext uri="{FF2B5EF4-FFF2-40B4-BE49-F238E27FC236}">
+                <a16:creationId xmlns:a16="http://schemas.microsoft.com/office/drawing/2014/main" id="{D0763566-6B77-4E78-B9CF-71B93E2A44B0}"/>
+              </a:ext>
+            </a:extLst>
+          </p:cNvPr>
+          <p:cNvSpPr>
+            <a:spLocks noGrp="1"/>
+          </p:cNvSpPr>
+          <p:nvPr>
+            <p:ph type="title"/>
+          </p:nvPr>
+        </p:nvSpPr>
+        <p:spPr/>
+        <p:txBody>
+          <a:bodyPr/>
+          <a:lstStyle/>
+          <a:p>
+            <a:r>
+              <a:rPr lang="el-GR" dirty="0"/>
+              <a:t>Εισαγωγή</a:t>
+            </a:r>
+          </a:p>
+        </p:txBody>
+      </p:sp>
+      <p:sp>
+        <p:nvSpPr>
+          <p:cNvPr id="4" name="Text Placeholder 3">
+            <a:extLst>
+              <a:ext uri="{FF2B5EF4-FFF2-40B4-BE49-F238E27FC236}">
+                <a16:creationId xmlns:a16="http://schemas.microsoft.com/office/drawing/2014/main" id="{DDFA47E4-2C69-B07E-47D6-C521A6217212}"/>
+              </a:ext>
+            </a:extLst>
+          </p:cNvPr>
+          <p:cNvSpPr>
+            <a:spLocks noGrp="1"/>
+          </p:cNvSpPr>
+          <p:nvPr>
+            <p:ph type="body" sz="quarter" idx="10"/>
+          </p:nvPr>
+        </p:nvSpPr>
+        <p:spPr/>
+        <p:txBody>
+          <a:bodyPr/>
+          <a:lstStyle/>
+          <a:p>
+            <a:endParaRPr lang="el-GR"/>
+          </a:p>
+        </p:txBody>
+      </p:sp>
+    </p:spTree>
+    <p:extLst>
+      <p:ext uri="{BB962C8B-B14F-4D97-AF65-F5344CB8AC3E}">
+        <p14:creationId xmlns:p14="http://schemas.microsoft.com/office/powerpoint/2010/main" val="52177786"/>
+      </p:ext>
+    </p:extLst>
+  </p:cSld>
+  <p:clrMapOvr>
+    <a:masterClrMapping/>
+  </p:clrMapOvr>
+</p:sld>
+</file>
+
+<file path=ppt/slides/slide3.xml><?xml version="1.0" encoding="utf-8"?>
+<p:sld xmlns:a="http://schemas.openxmlformats.org/drawingml/2006/main" xmlns:r="http://schemas.openxmlformats.org/officeDocument/2006/relationships" xmlns:p="http://schemas.openxmlformats.org/presentationml/2006/main">
+  <p:cSld>
+    <p:spTree>
+      <p:nvGrpSpPr>
+        <p:cNvPr id="1" name=""/>
+        <p:cNvGrpSpPr/>
+        <p:nvPr/>
+      </p:nvGrpSpPr>
+      <p:grpSpPr>
+        <a:xfrm>
+          <a:off x="0" y="0"/>
+          <a:ext cx="0" cy="0"/>
+          <a:chOff x="0" y="0"/>
+          <a:chExt cx="0" cy="0"/>
+        </a:xfrm>
+      </p:grpSpPr>
+      <p:sp>
+        <p:nvSpPr>
+          <p:cNvPr id="4" name="Slide Number Placeholder 3">
+            <a:extLst>
+              <a:ext uri="{FF2B5EF4-FFF2-40B4-BE49-F238E27FC236}">
+                <a16:creationId xmlns:a16="http://schemas.microsoft.com/office/drawing/2014/main" id="{1573CAB2-A1FC-4F2C-5835-46902E4B4CD5}"/>
+              </a:ext>
+            </a:extLst>
+          </p:cNvPr>
+          <p:cNvSpPr>
+            <a:spLocks noGrp="1"/>
+          </p:cNvSpPr>
+          <p:nvPr>
+            <p:ph type="sldNum" sz="quarter" idx="4"/>
+          </p:nvPr>
+        </p:nvSpPr>
+        <p:spPr/>
+        <p:txBody>
+          <a:bodyPr/>
+          <a:lstStyle/>
+          <a:p>
+            <a:fld id="{3490C777-6B35-47B1-993A-7400E925DBDB}" type="slidenum">
+              <a:rPr lang="en-US" smtClean="0"/>
+              <a:pPr/>
+              <a:t>3</a:t>
+            </a:fld>
+            <a:endParaRPr lang="en-US" dirty="0">
+              <a:latin typeface="Aptos" panose="020B0004020202020204" pitchFamily="34" charset="0"/>
+            </a:endParaRPr>
+          </a:p>
+        </p:txBody>
+      </p:sp>
+      <p:sp>
+        <p:nvSpPr>
+          <p:cNvPr id="2" name="Title 1">
+            <a:extLst>
+              <a:ext uri="{FF2B5EF4-FFF2-40B4-BE49-F238E27FC236}">
+                <a16:creationId xmlns:a16="http://schemas.microsoft.com/office/drawing/2014/main" id="{801DC17D-E0A7-2593-B42B-65B53BBD6621}"/>
+              </a:ext>
+            </a:extLst>
+          </p:cNvPr>
+          <p:cNvSpPr>
+            <a:spLocks noGrp="1"/>
+          </p:cNvSpPr>
+          <p:nvPr>
+            <p:ph type="title"/>
+          </p:nvPr>
+        </p:nvSpPr>
+        <p:spPr/>
+        <p:txBody>
+          <a:bodyPr/>
+          <a:lstStyle/>
+          <a:p>
+            <a:r>
+              <a:rPr lang="el-GR" dirty="0"/>
+              <a:t>Δομή Παρουσίασης</a:t>
+            </a:r>
+            <a:endParaRPr lang="en-US" dirty="0"/>
+          </a:p>
+        </p:txBody>
+      </p:sp>
+      <p:pic>
+        <p:nvPicPr>
+          <p:cNvPr id="27" name="Picture 26">
+            <a:extLst>
+              <a:ext uri="{FF2B5EF4-FFF2-40B4-BE49-F238E27FC236}">
+                <a16:creationId xmlns:a16="http://schemas.microsoft.com/office/drawing/2014/main" id="{196256EA-ED74-005C-B3DC-EC7354C773D8}"/>
+              </a:ext>
+            </a:extLst>
+          </p:cNvPr>
+          <p:cNvPicPr>
+            <a:picLocks noChangeAspect="1"/>
+          </p:cNvPicPr>
+          <p:nvPr/>
+        </p:nvPicPr>
+        <p:blipFill>
+          <a:blip r:embed="rId2" cstate="print">
+            <a:extLst>
+              <a:ext uri="{28A0092B-C50C-407E-A947-70E740481C1C}">
+                <a14:useLocalDpi xmlns:a14="http://schemas.microsoft.com/office/drawing/2010/main" val="0"/>
+              </a:ext>
+            </a:extLst>
+          </a:blip>
+          <a:stretch>
+            <a:fillRect/>
+          </a:stretch>
+        </p:blipFill>
+        <p:spPr>
+          <a:xfrm>
+            <a:off x="6926636" y="3688965"/>
+            <a:ext cx="1010697" cy="1010697"/>
+          </a:xfrm>
+          <a:prstGeom prst="rect">
+            <a:avLst/>
+          </a:prstGeom>
+        </p:spPr>
+      </p:pic>
+      <p:pic>
+        <p:nvPicPr>
+          <p:cNvPr id="29" name="Picture 28">
+            <a:extLst>
+              <a:ext uri="{FF2B5EF4-FFF2-40B4-BE49-F238E27FC236}">
+                <a16:creationId xmlns:a16="http://schemas.microsoft.com/office/drawing/2014/main" id="{69B4583C-7192-4963-C04F-5B2CBA607B6B}"/>
+              </a:ext>
+            </a:extLst>
+          </p:cNvPr>
+          <p:cNvPicPr>
+            <a:picLocks noChangeAspect="1"/>
+          </p:cNvPicPr>
+          <p:nvPr/>
+        </p:nvPicPr>
+        <p:blipFill>
+          <a:blip r:embed="rId3" cstate="print">
+            <a:extLst>
+              <a:ext uri="{28A0092B-C50C-407E-A947-70E740481C1C}">
+                <a14:useLocalDpi xmlns:a14="http://schemas.microsoft.com/office/drawing/2010/main" val="0"/>
+              </a:ext>
+            </a:extLst>
+          </a:blip>
+          <a:stretch>
+            <a:fillRect/>
+          </a:stretch>
+        </p:blipFill>
+        <p:spPr>
+          <a:xfrm>
+            <a:off x="1451522" y="3698913"/>
+            <a:ext cx="1010697" cy="1010697"/>
+          </a:xfrm>
+          <a:prstGeom prst="rect">
+            <a:avLst/>
+          </a:prstGeom>
+        </p:spPr>
+      </p:pic>
+      <p:pic>
+        <p:nvPicPr>
+          <p:cNvPr id="31" name="Picture 30">
+            <a:extLst>
+              <a:ext uri="{FF2B5EF4-FFF2-40B4-BE49-F238E27FC236}">
+                <a16:creationId xmlns:a16="http://schemas.microsoft.com/office/drawing/2014/main" id="{4A48117C-AAFD-8301-B40D-56BC55725AA0}"/>
+              </a:ext>
+            </a:extLst>
+          </p:cNvPr>
+          <p:cNvPicPr>
+            <a:picLocks noChangeAspect="1"/>
+          </p:cNvPicPr>
+          <p:nvPr/>
+        </p:nvPicPr>
+        <p:blipFill>
+          <a:blip r:embed="rId4" cstate="print">
+            <a:extLst>
+              <a:ext uri="{28A0092B-C50C-407E-A947-70E740481C1C}">
+                <a14:useLocalDpi xmlns:a14="http://schemas.microsoft.com/office/drawing/2010/main" val="0"/>
+              </a:ext>
+            </a:extLst>
+          </a:blip>
+          <a:stretch>
+            <a:fillRect/>
+          </a:stretch>
+        </p:blipFill>
+        <p:spPr>
+          <a:xfrm>
+            <a:off x="1451521" y="2344473"/>
+            <a:ext cx="1010697" cy="1010697"/>
+          </a:xfrm>
+          <a:prstGeom prst="rect">
+            <a:avLst/>
+          </a:prstGeom>
+        </p:spPr>
+      </p:pic>
+      <p:pic>
+        <p:nvPicPr>
+          <p:cNvPr id="33" name="Picture 32">
+            <a:extLst>
+              <a:ext uri="{FF2B5EF4-FFF2-40B4-BE49-F238E27FC236}">
+                <a16:creationId xmlns:a16="http://schemas.microsoft.com/office/drawing/2014/main" id="{328DF4D8-EC80-FC82-9C22-0B653C30B9EB}"/>
+              </a:ext>
+            </a:extLst>
+          </p:cNvPr>
+          <p:cNvPicPr>
+            <a:picLocks noChangeAspect="1"/>
+          </p:cNvPicPr>
+          <p:nvPr/>
+        </p:nvPicPr>
+        <p:blipFill>
+          <a:blip r:embed="rId5" cstate="print">
+            <a:extLst>
+              <a:ext uri="{28A0092B-C50C-407E-A947-70E740481C1C}">
+                <a14:useLocalDpi xmlns:a14="http://schemas.microsoft.com/office/drawing/2010/main" val="0"/>
+              </a:ext>
+            </a:extLst>
+          </a:blip>
+          <a:stretch>
+            <a:fillRect/>
+          </a:stretch>
+        </p:blipFill>
+        <p:spPr>
+          <a:xfrm>
+            <a:off x="1196992" y="5014521"/>
+            <a:ext cx="1519756" cy="1010697"/>
+          </a:xfrm>
+          <a:prstGeom prst="rect">
+            <a:avLst/>
+          </a:prstGeom>
+        </p:spPr>
+      </p:pic>
+      <p:pic>
+        <p:nvPicPr>
+          <p:cNvPr id="35" name="Picture 34">
+            <a:extLst>
+              <a:ext uri="{FF2B5EF4-FFF2-40B4-BE49-F238E27FC236}">
+                <a16:creationId xmlns:a16="http://schemas.microsoft.com/office/drawing/2014/main" id="{62825CDA-6CF4-983F-0A8C-C929017A3B44}"/>
+              </a:ext>
+            </a:extLst>
+          </p:cNvPr>
+          <p:cNvPicPr>
+            <a:picLocks noChangeAspect="1"/>
+          </p:cNvPicPr>
+          <p:nvPr/>
+        </p:nvPicPr>
+        <p:blipFill>
+          <a:blip r:embed="rId6" cstate="print">
+            <a:extLst>
+              <a:ext uri="{28A0092B-C50C-407E-A947-70E740481C1C}">
+                <a14:useLocalDpi xmlns:a14="http://schemas.microsoft.com/office/drawing/2010/main" val="0"/>
+              </a:ext>
+            </a:extLst>
+          </a:blip>
+          <a:stretch>
+            <a:fillRect/>
+          </a:stretch>
+        </p:blipFill>
+        <p:spPr>
+          <a:xfrm>
+            <a:off x="6926635" y="1046257"/>
+            <a:ext cx="1010697" cy="1010697"/>
+          </a:xfrm>
+          <a:prstGeom prst="rect">
+            <a:avLst/>
+          </a:prstGeom>
+        </p:spPr>
+      </p:pic>
+      <p:pic>
+        <p:nvPicPr>
+          <p:cNvPr id="37" name="Picture 36">
+            <a:extLst>
+              <a:ext uri="{FF2B5EF4-FFF2-40B4-BE49-F238E27FC236}">
+                <a16:creationId xmlns:a16="http://schemas.microsoft.com/office/drawing/2014/main" id="{9817F2D1-7F55-08F2-2AA0-64A2B2DD71A7}"/>
+              </a:ext>
+            </a:extLst>
+          </p:cNvPr>
+          <p:cNvPicPr>
+            <a:picLocks noChangeAspect="1"/>
+          </p:cNvPicPr>
+          <p:nvPr/>
+        </p:nvPicPr>
+        <p:blipFill>
+          <a:blip r:embed="rId7" cstate="print">
+            <a:extLst>
+              <a:ext uri="{28A0092B-C50C-407E-A947-70E740481C1C}">
+                <a14:useLocalDpi xmlns:a14="http://schemas.microsoft.com/office/drawing/2010/main" val="0"/>
+              </a:ext>
+            </a:extLst>
+          </a:blip>
+          <a:stretch>
+            <a:fillRect/>
+          </a:stretch>
+        </p:blipFill>
+        <p:spPr>
+          <a:xfrm>
+            <a:off x="6926637" y="5014521"/>
+            <a:ext cx="1010697" cy="1010697"/>
+          </a:xfrm>
+          <a:prstGeom prst="rect">
+            <a:avLst/>
+          </a:prstGeom>
+        </p:spPr>
+      </p:pic>
+      <p:sp>
+        <p:nvSpPr>
+          <p:cNvPr id="40" name="Rectangle 39">
+            <a:extLst>
+              <a:ext uri="{FF2B5EF4-FFF2-40B4-BE49-F238E27FC236}">
+                <a16:creationId xmlns:a16="http://schemas.microsoft.com/office/drawing/2014/main" id="{01C3256C-13FA-1E95-99C2-C0C2586A05A2}"/>
+              </a:ext>
+            </a:extLst>
+          </p:cNvPr>
+          <p:cNvSpPr/>
+          <p:nvPr/>
+        </p:nvSpPr>
+        <p:spPr>
+          <a:xfrm>
+            <a:off x="2462219" y="2807647"/>
+            <a:ext cx="4531434" cy="646331"/>
+          </a:xfrm>
+          <a:prstGeom prst="rect">
+            <a:avLst/>
+          </a:prstGeom>
+        </p:spPr>
+        <p:txBody>
+          <a:bodyPr wrap="square">
+            <a:spAutoFit/>
+          </a:bodyPr>
+          <a:lstStyle/>
+          <a:p>
+            <a:r>
+              <a:rPr lang="el-GR" sz="1800" b="1" dirty="0"/>
+              <a:t>Αναπαράσταση ανθρώπινης συμπεριφοράς</a:t>
+            </a:r>
+            <a:endParaRPr lang="en-US" sz="1800" i="1" dirty="0"/>
+          </a:p>
+        </p:txBody>
+      </p:sp>
+      <p:sp>
+        <p:nvSpPr>
+          <p:cNvPr id="41" name="Rectangle 40">
+            <a:extLst>
+              <a:ext uri="{FF2B5EF4-FFF2-40B4-BE49-F238E27FC236}">
+                <a16:creationId xmlns:a16="http://schemas.microsoft.com/office/drawing/2014/main" id="{39E0F0F7-2F75-08B3-FEA3-E53E9FE6F674}"/>
+              </a:ext>
+            </a:extLst>
+          </p:cNvPr>
+          <p:cNvSpPr/>
+          <p:nvPr/>
+        </p:nvSpPr>
+        <p:spPr>
+          <a:xfrm>
+            <a:off x="2462219" y="4077846"/>
+            <a:ext cx="4632802" cy="646331"/>
+          </a:xfrm>
+          <a:prstGeom prst="rect">
+            <a:avLst/>
+          </a:prstGeom>
+        </p:spPr>
+        <p:txBody>
+          <a:bodyPr wrap="square">
+            <a:spAutoFit/>
+          </a:bodyPr>
+          <a:lstStyle/>
+          <a:p>
+            <a:r>
+              <a:rPr lang="el-GR" sz="1800" b="1" dirty="0"/>
+              <a:t>Είδη κινδύνου στη βιομηχανία και υδρόθειο</a:t>
+            </a:r>
+            <a:endParaRPr lang="en-US" sz="1800" i="1" dirty="0"/>
+          </a:p>
+        </p:txBody>
+      </p:sp>
+      <p:sp>
+        <p:nvSpPr>
+          <p:cNvPr id="42" name="Rectangle 41">
+            <a:extLst>
+              <a:ext uri="{FF2B5EF4-FFF2-40B4-BE49-F238E27FC236}">
+                <a16:creationId xmlns:a16="http://schemas.microsoft.com/office/drawing/2014/main" id="{C9DA5C62-CEF6-0F45-18E5-AED6EDDDBC1C}"/>
+              </a:ext>
+            </a:extLst>
+          </p:cNvPr>
+          <p:cNvSpPr/>
+          <p:nvPr/>
+        </p:nvSpPr>
+        <p:spPr>
+          <a:xfrm>
+            <a:off x="2462219" y="5448330"/>
+            <a:ext cx="4209886" cy="646331"/>
+          </a:xfrm>
+          <a:prstGeom prst="rect">
+            <a:avLst/>
+          </a:prstGeom>
+        </p:spPr>
+        <p:txBody>
+          <a:bodyPr wrap="square">
+            <a:spAutoFit/>
+          </a:bodyPr>
+          <a:lstStyle/>
+          <a:p>
+            <a:r>
+              <a:rPr lang="el-GR" sz="1800" b="1" dirty="0"/>
+              <a:t>Επίδραση του κινδύνου στην εκκένωση</a:t>
+            </a:r>
+            <a:endParaRPr lang="en-US" sz="1800" i="1" dirty="0"/>
+          </a:p>
+        </p:txBody>
+      </p:sp>
+      <p:sp>
+        <p:nvSpPr>
+          <p:cNvPr id="46" name="Rectangle 45">
+            <a:extLst>
+              <a:ext uri="{FF2B5EF4-FFF2-40B4-BE49-F238E27FC236}">
+                <a16:creationId xmlns:a16="http://schemas.microsoft.com/office/drawing/2014/main" id="{68EB3DE5-48CB-5266-29E5-B34DC5FED9EB}"/>
+              </a:ext>
+            </a:extLst>
+          </p:cNvPr>
+          <p:cNvSpPr/>
+          <p:nvPr/>
+        </p:nvSpPr>
+        <p:spPr>
+          <a:xfrm>
+            <a:off x="7937332" y="1372110"/>
+            <a:ext cx="4762546" cy="369332"/>
+          </a:xfrm>
+          <a:prstGeom prst="rect">
+            <a:avLst/>
+          </a:prstGeom>
+        </p:spPr>
+        <p:txBody>
+          <a:bodyPr wrap="square">
+            <a:spAutoFit/>
+          </a:bodyPr>
+          <a:lstStyle/>
+          <a:p>
+            <a:r>
+              <a:rPr lang="el-GR" sz="1800" b="1" dirty="0"/>
+              <a:t>Αλγόριθμοι εύρεσης διαδρομής</a:t>
+            </a:r>
+            <a:endParaRPr lang="en-US" sz="1800" i="1" dirty="0"/>
+          </a:p>
+        </p:txBody>
+      </p:sp>
+      <p:sp>
+        <p:nvSpPr>
+          <p:cNvPr id="48" name="Rectangle 47">
+            <a:extLst>
+              <a:ext uri="{FF2B5EF4-FFF2-40B4-BE49-F238E27FC236}">
+                <a16:creationId xmlns:a16="http://schemas.microsoft.com/office/drawing/2014/main" id="{79EB71DE-17B5-DD99-9D34-6D0912374C51}"/>
+              </a:ext>
+            </a:extLst>
+          </p:cNvPr>
+          <p:cNvSpPr/>
+          <p:nvPr/>
+        </p:nvSpPr>
+        <p:spPr>
+          <a:xfrm>
+            <a:off x="7937332" y="4087562"/>
+            <a:ext cx="4762546" cy="369332"/>
+          </a:xfrm>
+          <a:prstGeom prst="rect">
+            <a:avLst/>
+          </a:prstGeom>
+        </p:spPr>
+        <p:txBody>
+          <a:bodyPr wrap="square">
+            <a:spAutoFit/>
+          </a:bodyPr>
+          <a:lstStyle/>
+          <a:p>
+            <a:r>
+              <a:rPr lang="el-GR" sz="1800" b="1" dirty="0"/>
+              <a:t>Περίπτωση μελέτης</a:t>
+            </a:r>
+            <a:endParaRPr lang="en-US" sz="1800" i="1" dirty="0"/>
+          </a:p>
+        </p:txBody>
+      </p:sp>
+      <p:sp>
+        <p:nvSpPr>
+          <p:cNvPr id="49" name="Rectangle 48">
+            <a:extLst>
+              <a:ext uri="{FF2B5EF4-FFF2-40B4-BE49-F238E27FC236}">
+                <a16:creationId xmlns:a16="http://schemas.microsoft.com/office/drawing/2014/main" id="{10130989-8076-AD26-B4DF-B06321C6C67E}"/>
+              </a:ext>
+            </a:extLst>
+          </p:cNvPr>
+          <p:cNvSpPr/>
+          <p:nvPr/>
+        </p:nvSpPr>
+        <p:spPr>
+          <a:xfrm>
+            <a:off x="7937332" y="5458046"/>
+            <a:ext cx="4762546" cy="369332"/>
+          </a:xfrm>
+          <a:prstGeom prst="rect">
+            <a:avLst/>
+          </a:prstGeom>
+        </p:spPr>
+        <p:txBody>
+          <a:bodyPr wrap="square">
+            <a:spAutoFit/>
+          </a:bodyPr>
+          <a:lstStyle/>
+          <a:p>
+            <a:r>
+              <a:rPr lang="el-GR" sz="1800" b="1" dirty="0"/>
+              <a:t>Αποτελέσματα</a:t>
+            </a:r>
+            <a:endParaRPr lang="en-US" sz="1800" i="1" dirty="0"/>
+          </a:p>
+        </p:txBody>
+      </p:sp>
+      <p:pic>
+        <p:nvPicPr>
+          <p:cNvPr id="51" name="Picture 50">
+            <a:extLst>
+              <a:ext uri="{FF2B5EF4-FFF2-40B4-BE49-F238E27FC236}">
+                <a16:creationId xmlns:a16="http://schemas.microsoft.com/office/drawing/2014/main" id="{AC305DC1-C0EC-6E0F-1D11-EFDCDB8990DA}"/>
+              </a:ext>
+            </a:extLst>
+          </p:cNvPr>
+          <p:cNvPicPr>
+            <a:picLocks noChangeAspect="1"/>
+          </p:cNvPicPr>
+          <p:nvPr/>
+        </p:nvPicPr>
+        <p:blipFill>
+          <a:blip r:embed="rId8" cstate="print">
+            <a:extLst>
+              <a:ext uri="{28A0092B-C50C-407E-A947-70E740481C1C}">
+                <a14:useLocalDpi xmlns:a14="http://schemas.microsoft.com/office/drawing/2010/main" val="0"/>
+              </a:ext>
+            </a:extLst>
+          </a:blip>
+          <a:stretch>
+            <a:fillRect/>
+          </a:stretch>
+        </p:blipFill>
+        <p:spPr>
+          <a:xfrm>
+            <a:off x="1451520" y="1046257"/>
+            <a:ext cx="1010697" cy="1010697"/>
+          </a:xfrm>
+          <a:prstGeom prst="rect">
+            <a:avLst/>
+          </a:prstGeom>
+        </p:spPr>
+      </p:pic>
+      <p:sp>
+        <p:nvSpPr>
+          <p:cNvPr id="52" name="Rectangle 51">
+            <a:extLst>
+              <a:ext uri="{FF2B5EF4-FFF2-40B4-BE49-F238E27FC236}">
+                <a16:creationId xmlns:a16="http://schemas.microsoft.com/office/drawing/2014/main" id="{69A45EF7-C8DD-E25A-0ED1-2569A7603A53}"/>
+              </a:ext>
+            </a:extLst>
+          </p:cNvPr>
+          <p:cNvSpPr/>
+          <p:nvPr/>
+        </p:nvSpPr>
+        <p:spPr>
+          <a:xfrm>
+            <a:off x="2462219" y="1362394"/>
+            <a:ext cx="4762546" cy="369332"/>
+          </a:xfrm>
+          <a:prstGeom prst="rect">
+            <a:avLst/>
+          </a:prstGeom>
+        </p:spPr>
+        <p:txBody>
+          <a:bodyPr wrap="square">
+            <a:spAutoFit/>
+          </a:bodyPr>
+          <a:lstStyle/>
+          <a:p>
+            <a:r>
+              <a:rPr lang="el-GR" sz="1800" b="1" dirty="0"/>
+              <a:t>Τι υπάρχει σήμερα</a:t>
+            </a:r>
+            <a:endParaRPr lang="en-US" sz="1800" i="1" dirty="0"/>
+          </a:p>
+        </p:txBody>
+      </p:sp>
+      <p:pic>
+        <p:nvPicPr>
+          <p:cNvPr id="55" name="Picture 54">
+            <a:extLst>
+              <a:ext uri="{FF2B5EF4-FFF2-40B4-BE49-F238E27FC236}">
+                <a16:creationId xmlns:a16="http://schemas.microsoft.com/office/drawing/2014/main" id="{3DDBC42C-FD5C-B609-69BB-8CC7E3643FF3}"/>
+              </a:ext>
+            </a:extLst>
+          </p:cNvPr>
+          <p:cNvPicPr>
+            <a:picLocks noChangeAspect="1"/>
+          </p:cNvPicPr>
+          <p:nvPr/>
+        </p:nvPicPr>
+        <p:blipFill>
+          <a:blip r:embed="rId9" cstate="print">
+            <a:extLst>
+              <a:ext uri="{28A0092B-C50C-407E-A947-70E740481C1C}">
+                <a14:useLocalDpi xmlns:a14="http://schemas.microsoft.com/office/drawing/2010/main" val="0"/>
+              </a:ext>
+            </a:extLst>
+          </a:blip>
+          <a:stretch>
+            <a:fillRect/>
+          </a:stretch>
+        </p:blipFill>
+        <p:spPr>
+          <a:xfrm>
+            <a:off x="6926635" y="2445835"/>
+            <a:ext cx="1010697" cy="1010697"/>
+          </a:xfrm>
+          <a:prstGeom prst="rect">
+            <a:avLst/>
+          </a:prstGeom>
+        </p:spPr>
+      </p:pic>
+      <p:sp>
+        <p:nvSpPr>
+          <p:cNvPr id="57" name="Rectangle 56">
+            <a:extLst>
+              <a:ext uri="{FF2B5EF4-FFF2-40B4-BE49-F238E27FC236}">
+                <a16:creationId xmlns:a16="http://schemas.microsoft.com/office/drawing/2014/main" id="{B3CD80CC-C07E-58C9-D1B1-93BFDD38E8D9}"/>
+              </a:ext>
+            </a:extLst>
+          </p:cNvPr>
+          <p:cNvSpPr/>
+          <p:nvPr/>
+        </p:nvSpPr>
+        <p:spPr>
+          <a:xfrm>
+            <a:off x="7937332" y="2776233"/>
+            <a:ext cx="4762546" cy="369332"/>
+          </a:xfrm>
+          <a:prstGeom prst="rect">
+            <a:avLst/>
+          </a:prstGeom>
+        </p:spPr>
+        <p:txBody>
+          <a:bodyPr wrap="square">
+            <a:spAutoFit/>
+          </a:bodyPr>
+          <a:lstStyle/>
+          <a:p>
+            <a:r>
+              <a:rPr lang="en-US" sz="1800" b="1" dirty="0"/>
+              <a:t>Julia </a:t>
+            </a:r>
+            <a:r>
+              <a:rPr lang="el-GR" sz="1800" b="1" dirty="0"/>
+              <a:t>ως περιβάλλον προσομοίωσης </a:t>
+            </a:r>
+            <a:endParaRPr lang="en-US" sz="1800" i="1" dirty="0"/>
+          </a:p>
+        </p:txBody>
+      </p:sp>
+    </p:spTree>
+    <p:extLst>
+      <p:ext uri="{BB962C8B-B14F-4D97-AF65-F5344CB8AC3E}">
+        <p14:creationId xmlns:p14="http://schemas.microsoft.com/office/powerpoint/2010/main" val="2865516353"/>
+      </p:ext>
+    </p:extLst>
+  </p:cSld>
+  <p:clrMapOvr>
+    <a:masterClrMapping/>
+  </p:clrMapOvr>
+  <mc:AlternateContent xmlns:mc="http://schemas.openxmlformats.org/markup-compatibility/2006" xmlns:p159="http://schemas.microsoft.com/office/powerpoint/2015/09/main">
+    <mc:Choice Requires="p159">
+      <p:transition xmlns:p14="http://schemas.microsoft.com/office/powerpoint/2010/main" spd="slow" p14:dur="2000">
+        <p159:morph option="byObject"/>
+      </p:transition>
+    </mc:Choice>
+    <mc:Fallback xmlns="">
+      <p:transition spd="slow">
+        <p:fade/>
+      </p:transition>
+    </mc:Fallback>
+  </mc:AlternateContent>
+</p:sld>
+</file>
+
+<file path=ppt/slides/slide4.xml><?xml version="1.0" encoding="utf-8"?>
+<p:sld xmlns:a="http://schemas.openxmlformats.org/drawingml/2006/main" xmlns:r="http://schemas.openxmlformats.org/officeDocument/2006/relationships" xmlns:p="http://schemas.openxmlformats.org/presentationml/2006/main">
+  <p:cSld>
+    <p:spTree>
+      <p:nvGrpSpPr>
+        <p:cNvPr id="1" name=""/>
+        <p:cNvGrpSpPr/>
+        <p:nvPr/>
+      </p:nvGrpSpPr>
+      <p:grpSpPr>
+        <a:xfrm>
+          <a:off x="0" y="0"/>
+          <a:ext cx="0" cy="0"/>
+          <a:chOff x="0" y="0"/>
+          <a:chExt cx="0" cy="0"/>
+        </a:xfrm>
+      </p:grpSpPr>
+      <p:sp>
+        <p:nvSpPr>
+          <p:cNvPr id="2" name="Slide Number Placeholder 1">
+            <a:extLst>
+              <a:ext uri="{FF2B5EF4-FFF2-40B4-BE49-F238E27FC236}">
+                <a16:creationId xmlns:a16="http://schemas.microsoft.com/office/drawing/2014/main" id="{E3500431-1201-AA39-A8CA-2E83706ECFA8}"/>
+              </a:ext>
+            </a:extLst>
+          </p:cNvPr>
+          <p:cNvSpPr>
+            <a:spLocks noGrp="1"/>
+          </p:cNvSpPr>
+          <p:nvPr>
+            <p:ph type="sldNum" sz="quarter" idx="4"/>
+          </p:nvPr>
+        </p:nvSpPr>
+        <p:spPr/>
+        <p:txBody>
+          <a:bodyPr/>
+          <a:lstStyle/>
+          <a:p>
+            <a:fld id="{3490C777-6B35-47B1-993A-7400E925DBDB}" type="slidenum">
+              <a:rPr lang="en-US" smtClean="0"/>
+              <a:pPr/>
+              <a:t>4</a:t>
+            </a:fld>
+            <a:endParaRPr lang="en-US" dirty="0">
+              <a:latin typeface="Aptos" panose="020B0004020202020204" pitchFamily="34" charset="0"/>
+            </a:endParaRPr>
+          </a:p>
+        </p:txBody>
+      </p:sp>
+      <p:sp>
+        <p:nvSpPr>
+          <p:cNvPr id="3" name="Title 2">
+            <a:extLst>
+              <a:ext uri="{FF2B5EF4-FFF2-40B4-BE49-F238E27FC236}">
+                <a16:creationId xmlns:a16="http://schemas.microsoft.com/office/drawing/2014/main" id="{3341B4B9-540E-A42F-4695-3FFC70D946C0}"/>
+              </a:ext>
+            </a:extLst>
+          </p:cNvPr>
+          <p:cNvSpPr>
+            <a:spLocks noGrp="1"/>
+          </p:cNvSpPr>
+          <p:nvPr>
+            <p:ph type="title"/>
+          </p:nvPr>
+        </p:nvSpPr>
+        <p:spPr/>
+        <p:txBody>
+          <a:bodyPr/>
+          <a:lstStyle/>
+          <a:p>
+            <a:r>
+              <a:rPr lang="el-GR" dirty="0"/>
+              <a:t>Βιβλιογραφία και κενά</a:t>
+            </a:r>
+          </a:p>
+        </p:txBody>
+      </p:sp>
+      <p:sp>
+        <p:nvSpPr>
+          <p:cNvPr id="4" name="Text Placeholder 3">
+            <a:extLst>
+              <a:ext uri="{FF2B5EF4-FFF2-40B4-BE49-F238E27FC236}">
+                <a16:creationId xmlns:a16="http://schemas.microsoft.com/office/drawing/2014/main" id="{4D568BD1-AF93-3AF4-CC23-B225F41857DF}"/>
+              </a:ext>
+            </a:extLst>
+          </p:cNvPr>
+          <p:cNvSpPr>
+            <a:spLocks noGrp="1"/>
+          </p:cNvSpPr>
+          <p:nvPr>
+            <p:ph type="body" sz="quarter" idx="10"/>
+          </p:nvPr>
+        </p:nvSpPr>
+        <p:spPr/>
+        <p:txBody>
+          <a:bodyPr/>
+          <a:lstStyle/>
+          <a:p>
+            <a:endParaRPr lang="el-GR" dirty="0"/>
+          </a:p>
+        </p:txBody>
+      </p:sp>
+    </p:spTree>
+    <p:extLst>
+      <p:ext uri="{BB962C8B-B14F-4D97-AF65-F5344CB8AC3E}">
+        <p14:creationId xmlns:p14="http://schemas.microsoft.com/office/powerpoint/2010/main" val="40660042"/>
+      </p:ext>
+    </p:extLst>
+  </p:cSld>
+  <p:clrMapOvr>
+    <a:masterClrMapping/>
+  </p:clrMapOvr>
+</p:sld>
+</file>
+
+<file path=ppt/slides/slide5.xml><?xml version="1.0" encoding="utf-8"?>
+<p:sld xmlns:a="http://schemas.openxmlformats.org/drawingml/2006/main" xmlns:r="http://schemas.openxmlformats.org/officeDocument/2006/relationships" xmlns:p="http://schemas.openxmlformats.org/presentationml/2006/main">
+  <p:cSld>
+    <p:spTree>
+      <p:nvGrpSpPr>
+        <p:cNvPr id="1" name=""/>
+        <p:cNvGrpSpPr/>
+        <p:nvPr/>
+      </p:nvGrpSpPr>
+      <p:grpSpPr>
+        <a:xfrm>
+          <a:off x="0" y="0"/>
+          <a:ext cx="0" cy="0"/>
+          <a:chOff x="0" y="0"/>
+          <a:chExt cx="0" cy="0"/>
+        </a:xfrm>
+      </p:grpSpPr>
+      <p:sp>
+        <p:nvSpPr>
+          <p:cNvPr id="2" name="Slide Number Placeholder 1">
+            <a:extLst>
+              <a:ext uri="{FF2B5EF4-FFF2-40B4-BE49-F238E27FC236}">
+                <a16:creationId xmlns:a16="http://schemas.microsoft.com/office/drawing/2014/main" id="{BDF281C8-85F9-6482-396B-B8003B8924CC}"/>
+              </a:ext>
+            </a:extLst>
+          </p:cNvPr>
+          <p:cNvSpPr>
+            <a:spLocks noGrp="1"/>
+          </p:cNvSpPr>
+          <p:nvPr>
+            <p:ph type="sldNum" sz="quarter" idx="4"/>
+          </p:nvPr>
+        </p:nvSpPr>
+        <p:spPr/>
+        <p:txBody>
+          <a:bodyPr/>
+          <a:lstStyle/>
+          <a:p>
+            <a:fld id="{3490C777-6B35-47B1-993A-7400E925DBDB}" type="slidenum">
+              <a:rPr lang="en-US" smtClean="0"/>
+              <a:pPr/>
+              <a:t>5</a:t>
+            </a:fld>
+            <a:endParaRPr lang="en-US" dirty="0">
+              <a:latin typeface="Aptos" panose="020B0004020202020204" pitchFamily="34" charset="0"/>
+            </a:endParaRPr>
+          </a:p>
+        </p:txBody>
+      </p:sp>
+      <p:sp>
+        <p:nvSpPr>
+          <p:cNvPr id="3" name="Title 2">
+            <a:extLst>
+              <a:ext uri="{FF2B5EF4-FFF2-40B4-BE49-F238E27FC236}">
+                <a16:creationId xmlns:a16="http://schemas.microsoft.com/office/drawing/2014/main" id="{560E39E9-5ECC-1900-C5E3-506FFDC687BF}"/>
+              </a:ext>
+            </a:extLst>
+          </p:cNvPr>
+          <p:cNvSpPr>
+            <a:spLocks noGrp="1"/>
+          </p:cNvSpPr>
+          <p:nvPr>
+            <p:ph type="title"/>
+          </p:nvPr>
+        </p:nvSpPr>
+        <p:spPr/>
+        <p:txBody>
+          <a:bodyPr/>
+          <a:lstStyle/>
+          <a:p>
+            <a:r>
+              <a:rPr lang="el-GR" dirty="0"/>
+              <a:t>Αναπαράσταση ανθρώπινης συμπεριφοράς</a:t>
+            </a:r>
+          </a:p>
+        </p:txBody>
+      </p:sp>
+      <p:sp>
+        <p:nvSpPr>
+          <p:cNvPr id="4" name="Text Placeholder 3">
+            <a:extLst>
+              <a:ext uri="{FF2B5EF4-FFF2-40B4-BE49-F238E27FC236}">
+                <a16:creationId xmlns:a16="http://schemas.microsoft.com/office/drawing/2014/main" id="{FD4B606E-B41E-066C-47F3-23001B8423B5}"/>
+              </a:ext>
+            </a:extLst>
+          </p:cNvPr>
+          <p:cNvSpPr>
+            <a:spLocks noGrp="1"/>
+          </p:cNvSpPr>
+          <p:nvPr>
+            <p:ph type="body" sz="quarter" idx="10"/>
+          </p:nvPr>
+        </p:nvSpPr>
+        <p:spPr/>
+        <p:txBody>
+          <a:bodyPr/>
+          <a:lstStyle/>
+          <a:p>
+            <a:endParaRPr lang="el-GR"/>
+          </a:p>
+        </p:txBody>
+      </p:sp>
+    </p:spTree>
+    <p:extLst>
+      <p:ext uri="{BB962C8B-B14F-4D97-AF65-F5344CB8AC3E}">
+        <p14:creationId xmlns:p14="http://schemas.microsoft.com/office/powerpoint/2010/main" val="1481066753"/>
+      </p:ext>
+    </p:extLst>
+  </p:cSld>
+  <p:clrMapOvr>
+    <a:masterClrMapping/>
+  </p:clrMapOvr>
+</p:sld>
+</file>
+
+<file path=ppt/slides/slide6.xml><?xml version="1.0" encoding="utf-8"?>
+<p:sld xmlns:a="http://schemas.openxmlformats.org/drawingml/2006/main" xmlns:r="http://schemas.openxmlformats.org/officeDocument/2006/relationships" xmlns:p="http://schemas.openxmlformats.org/presentationml/2006/main">
+  <p:cSld>
+    <p:spTree>
+      <p:nvGrpSpPr>
+        <p:cNvPr id="1" name=""/>
+        <p:cNvGrpSpPr/>
+        <p:nvPr/>
+      </p:nvGrpSpPr>
+      <p:grpSpPr>
+        <a:xfrm>
+          <a:off x="0" y="0"/>
+          <a:ext cx="0" cy="0"/>
+          <a:chOff x="0" y="0"/>
+          <a:chExt cx="0" cy="0"/>
+        </a:xfrm>
+      </p:grpSpPr>
+      <p:sp>
+        <p:nvSpPr>
+          <p:cNvPr id="2" name="Slide Number Placeholder 1">
+            <a:extLst>
+              <a:ext uri="{FF2B5EF4-FFF2-40B4-BE49-F238E27FC236}">
+                <a16:creationId xmlns:a16="http://schemas.microsoft.com/office/drawing/2014/main" id="{0E4EB3BC-52AB-BBB2-2E40-C740FC012D7D}"/>
+              </a:ext>
+            </a:extLst>
+          </p:cNvPr>
+          <p:cNvSpPr>
+            <a:spLocks noGrp="1"/>
+          </p:cNvSpPr>
+          <p:nvPr>
+            <p:ph type="sldNum" sz="quarter" idx="4"/>
+          </p:nvPr>
+        </p:nvSpPr>
+        <p:spPr/>
+        <p:txBody>
+          <a:bodyPr/>
+          <a:lstStyle/>
+          <a:p>
+            <a:fld id="{3490C777-6B35-47B1-993A-7400E925DBDB}" type="slidenum">
+              <a:rPr lang="en-US" smtClean="0"/>
+              <a:pPr/>
+              <a:t>6</a:t>
+            </a:fld>
+            <a:endParaRPr lang="en-US" dirty="0">
+              <a:latin typeface="Aptos" panose="020B0004020202020204" pitchFamily="34" charset="0"/>
+            </a:endParaRPr>
+          </a:p>
+        </p:txBody>
+      </p:sp>
+      <p:sp>
+        <p:nvSpPr>
+          <p:cNvPr id="3" name="Title 2">
+            <a:extLst>
+              <a:ext uri="{FF2B5EF4-FFF2-40B4-BE49-F238E27FC236}">
+                <a16:creationId xmlns:a16="http://schemas.microsoft.com/office/drawing/2014/main" id="{15D15286-F413-5EF2-AA9A-98120D05808A}"/>
+              </a:ext>
+            </a:extLst>
+          </p:cNvPr>
+          <p:cNvSpPr>
+            <a:spLocks noGrp="1"/>
+          </p:cNvSpPr>
+          <p:nvPr>
+            <p:ph type="title"/>
+          </p:nvPr>
+        </p:nvSpPr>
+        <p:spPr/>
+        <p:txBody>
+          <a:bodyPr/>
+          <a:lstStyle/>
+          <a:p>
+            <a:r>
+              <a:rPr lang="el-GR" dirty="0"/>
+              <a:t>Είδη κινδύνου στη βιομηχανία</a:t>
+            </a:r>
+          </a:p>
+        </p:txBody>
+      </p:sp>
+      <p:sp>
+        <p:nvSpPr>
+          <p:cNvPr id="4" name="Text Placeholder 3">
+            <a:extLst>
+              <a:ext uri="{FF2B5EF4-FFF2-40B4-BE49-F238E27FC236}">
+                <a16:creationId xmlns:a16="http://schemas.microsoft.com/office/drawing/2014/main" id="{B99BE128-314E-B8A0-ADEF-C57A8410C8E1}"/>
+              </a:ext>
+            </a:extLst>
+          </p:cNvPr>
+          <p:cNvSpPr>
+            <a:spLocks noGrp="1"/>
+          </p:cNvSpPr>
+          <p:nvPr>
+            <p:ph type="body" sz="quarter" idx="10"/>
+          </p:nvPr>
+        </p:nvSpPr>
+        <p:spPr/>
+        <p:txBody>
+          <a:bodyPr/>
+          <a:lstStyle/>
+          <a:p>
+            <a:endParaRPr lang="el-GR"/>
+          </a:p>
+        </p:txBody>
+      </p:sp>
+    </p:spTree>
+    <p:extLst>
+      <p:ext uri="{BB962C8B-B14F-4D97-AF65-F5344CB8AC3E}">
+        <p14:creationId xmlns:p14="http://schemas.microsoft.com/office/powerpoint/2010/main" val="2513164077"/>
+      </p:ext>
+    </p:extLst>
+  </p:cSld>
+  <p:clrMapOvr>
+    <a:masterClrMapping/>
+  </p:clrMapOvr>
+</p:sld>
+</file>
+
+<file path=ppt/slides/slide7.xml><?xml version="1.0" encoding="utf-8"?>
+<p:sld xmlns:a="http://schemas.openxmlformats.org/drawingml/2006/main" xmlns:r="http://schemas.openxmlformats.org/officeDocument/2006/relationships" xmlns:p="http://schemas.openxmlformats.org/presentationml/2006/main">
+  <p:cSld>
+    <p:spTree>
+      <p:nvGrpSpPr>
+        <p:cNvPr id="1" name=""/>
+        <p:cNvGrpSpPr/>
+        <p:nvPr/>
+      </p:nvGrpSpPr>
+      <p:grpSpPr>
+        <a:xfrm>
+          <a:off x="0" y="0"/>
+          <a:ext cx="0" cy="0"/>
+          <a:chOff x="0" y="0"/>
+          <a:chExt cx="0" cy="0"/>
+        </a:xfrm>
+      </p:grpSpPr>
+      <p:sp>
+        <p:nvSpPr>
+          <p:cNvPr id="2" name="Slide Number Placeholder 1">
+            <a:extLst>
+              <a:ext uri="{FF2B5EF4-FFF2-40B4-BE49-F238E27FC236}">
+                <a16:creationId xmlns:a16="http://schemas.microsoft.com/office/drawing/2014/main" id="{6E3B64F3-3CF1-1479-B6D0-49885D374865}"/>
+              </a:ext>
+            </a:extLst>
+          </p:cNvPr>
+          <p:cNvSpPr>
+            <a:spLocks noGrp="1"/>
+          </p:cNvSpPr>
+          <p:nvPr>
+            <p:ph type="sldNum" sz="quarter" idx="4"/>
+          </p:nvPr>
+        </p:nvSpPr>
+        <p:spPr/>
+        <p:txBody>
+          <a:bodyPr/>
+          <a:lstStyle/>
+          <a:p>
+            <a:fld id="{3490C777-6B35-47B1-993A-7400E925DBDB}" type="slidenum">
+              <a:rPr lang="en-US" smtClean="0"/>
+              <a:pPr/>
+              <a:t>7</a:t>
+            </a:fld>
+            <a:endParaRPr lang="en-US" dirty="0">
+              <a:latin typeface="Aptos" panose="020B0004020202020204" pitchFamily="34" charset="0"/>
+            </a:endParaRPr>
+          </a:p>
+        </p:txBody>
+      </p:sp>
+      <p:sp>
+        <p:nvSpPr>
+          <p:cNvPr id="3" name="Title 2">
+            <a:extLst>
+              <a:ext uri="{FF2B5EF4-FFF2-40B4-BE49-F238E27FC236}">
+                <a16:creationId xmlns:a16="http://schemas.microsoft.com/office/drawing/2014/main" id="{55D05E2E-D496-9037-45E6-CB5E055A1120}"/>
+              </a:ext>
+            </a:extLst>
+          </p:cNvPr>
+          <p:cNvSpPr>
+            <a:spLocks noGrp="1"/>
+          </p:cNvSpPr>
+          <p:nvPr>
+            <p:ph type="title"/>
+          </p:nvPr>
+        </p:nvSpPr>
+        <p:spPr/>
+        <p:txBody>
+          <a:bodyPr/>
+          <a:lstStyle/>
+          <a:p>
+            <a:r>
+              <a:rPr lang="el-GR" dirty="0"/>
+              <a:t>Υδρόθειο</a:t>
+            </a:r>
+          </a:p>
+        </p:txBody>
+      </p:sp>
+      <p:sp>
+        <p:nvSpPr>
+          <p:cNvPr id="4" name="Text Placeholder 3">
+            <a:extLst>
+              <a:ext uri="{FF2B5EF4-FFF2-40B4-BE49-F238E27FC236}">
+                <a16:creationId xmlns:a16="http://schemas.microsoft.com/office/drawing/2014/main" id="{B68980BD-C91C-2516-F2EA-11BC53B33B6C}"/>
+              </a:ext>
+            </a:extLst>
+          </p:cNvPr>
+          <p:cNvSpPr>
+            <a:spLocks noGrp="1"/>
+          </p:cNvSpPr>
+          <p:nvPr>
+            <p:ph type="body" sz="quarter" idx="10"/>
+          </p:nvPr>
+        </p:nvSpPr>
+        <p:spPr/>
+        <p:txBody>
+          <a:bodyPr/>
+          <a:lstStyle/>
+          <a:p>
+            <a:endParaRPr lang="el-GR"/>
+          </a:p>
+        </p:txBody>
+      </p:sp>
+    </p:spTree>
+    <p:extLst>
+      <p:ext uri="{BB962C8B-B14F-4D97-AF65-F5344CB8AC3E}">
+        <p14:creationId xmlns:p14="http://schemas.microsoft.com/office/powerpoint/2010/main" val="190026587"/>
+      </p:ext>
+    </p:extLst>
+  </p:cSld>
+  <p:clrMapOvr>
+    <a:masterClrMapping/>
+  </p:clrMapOvr>
+</p:sld>
+</file>
+
+<file path=ppt/slides/slide8.xml><?xml version="1.0" encoding="utf-8"?>
+<p:sld xmlns:a="http://schemas.openxmlformats.org/drawingml/2006/main" xmlns:r="http://schemas.openxmlformats.org/officeDocument/2006/relationships" xmlns:p="http://schemas.openxmlformats.org/presentationml/2006/main">
+  <p:cSld>
+    <p:spTree>
+      <p:nvGrpSpPr>
+        <p:cNvPr id="1" name=""/>
+        <p:cNvGrpSpPr/>
+        <p:nvPr/>
+      </p:nvGrpSpPr>
+      <p:grpSpPr>
+        <a:xfrm>
+          <a:off x="0" y="0"/>
+          <a:ext cx="0" cy="0"/>
+          <a:chOff x="0" y="0"/>
+          <a:chExt cx="0" cy="0"/>
+        </a:xfrm>
+      </p:grpSpPr>
+      <p:sp>
+        <p:nvSpPr>
+          <p:cNvPr id="2" name="Slide Number Placeholder 1">
+            <a:extLst>
+              <a:ext uri="{FF2B5EF4-FFF2-40B4-BE49-F238E27FC236}">
+                <a16:creationId xmlns:a16="http://schemas.microsoft.com/office/drawing/2014/main" id="{9C60F291-1E6B-EA1D-6460-CF4CFB540AB3}"/>
+              </a:ext>
+            </a:extLst>
+          </p:cNvPr>
+          <p:cNvSpPr>
+            <a:spLocks noGrp="1"/>
+          </p:cNvSpPr>
+          <p:nvPr>
+            <p:ph type="sldNum" sz="quarter" idx="4"/>
+          </p:nvPr>
+        </p:nvSpPr>
+        <p:spPr/>
+        <p:txBody>
+          <a:bodyPr/>
+          <a:lstStyle/>
+          <a:p>
+            <a:fld id="{3490C777-6B35-47B1-993A-7400E925DBDB}" type="slidenum">
+              <a:rPr lang="en-US" smtClean="0"/>
+              <a:pPr/>
+              <a:t>8</a:t>
+            </a:fld>
+            <a:endParaRPr lang="en-US" dirty="0">
+              <a:latin typeface="Aptos" panose="020B0004020202020204" pitchFamily="34" charset="0"/>
+            </a:endParaRPr>
+          </a:p>
+        </p:txBody>
+      </p:sp>
+      <p:sp>
+        <p:nvSpPr>
+          <p:cNvPr id="3" name="Title 2">
+            <a:extLst>
+              <a:ext uri="{FF2B5EF4-FFF2-40B4-BE49-F238E27FC236}">
+                <a16:creationId xmlns:a16="http://schemas.microsoft.com/office/drawing/2014/main" id="{5C6F7B11-6744-0FA0-5F91-10B8C5B6F70F}"/>
+              </a:ext>
+            </a:extLst>
+          </p:cNvPr>
+          <p:cNvSpPr>
+            <a:spLocks noGrp="1"/>
+          </p:cNvSpPr>
+          <p:nvPr>
+            <p:ph type="title"/>
+          </p:nvPr>
+        </p:nvSpPr>
+        <p:spPr/>
+        <p:txBody>
+          <a:bodyPr/>
+          <a:lstStyle/>
+          <a:p>
+            <a:r>
+              <a:rPr lang="el-GR" dirty="0"/>
+              <a:t>Επίδραση του κινδύνου στην εκκένωση</a:t>
+            </a:r>
+          </a:p>
+        </p:txBody>
+      </p:sp>
+      <p:sp>
+        <p:nvSpPr>
+          <p:cNvPr id="4" name="Text Placeholder 3">
+            <a:extLst>
+              <a:ext uri="{FF2B5EF4-FFF2-40B4-BE49-F238E27FC236}">
+                <a16:creationId xmlns:a16="http://schemas.microsoft.com/office/drawing/2014/main" id="{BA829531-457E-3810-CB4F-612F647ACEB3}"/>
+              </a:ext>
+            </a:extLst>
+          </p:cNvPr>
+          <p:cNvSpPr>
+            <a:spLocks noGrp="1"/>
+          </p:cNvSpPr>
+          <p:nvPr>
+            <p:ph type="body" sz="quarter" idx="10"/>
+          </p:nvPr>
+        </p:nvSpPr>
+        <p:spPr/>
+        <p:txBody>
+          <a:bodyPr/>
+          <a:lstStyle/>
+          <a:p>
+            <a:endParaRPr lang="el-GR"/>
+          </a:p>
+        </p:txBody>
+      </p:sp>
+    </p:spTree>
+    <p:extLst>
+      <p:ext uri="{BB962C8B-B14F-4D97-AF65-F5344CB8AC3E}">
+        <p14:creationId xmlns:p14="http://schemas.microsoft.com/office/powerpoint/2010/main" val="3066887352"/>
+      </p:ext>
+    </p:extLst>
+  </p:cSld>
+  <p:clrMapOvr>
+    <a:masterClrMapping/>
+  </p:clrMapOvr>
+</p:sld>
+</file>
+
+<file path=ppt/slides/slide9.xml><?xml version="1.0" encoding="utf-8"?>
+<p:sld xmlns:a="http://schemas.openxmlformats.org/drawingml/2006/main" xmlns:r="http://schemas.openxmlformats.org/officeDocument/2006/relationships" xmlns:p="http://schemas.openxmlformats.org/presentationml/2006/main">
+  <p:cSld>
+    <p:spTree>
+      <p:nvGrpSpPr>
+        <p:cNvPr id="1" name="">
+          <a:extLst>
+            <a:ext uri="{FF2B5EF4-FFF2-40B4-BE49-F238E27FC236}">
+              <a16:creationId xmlns:a16="http://schemas.microsoft.com/office/drawing/2014/main" id="{2A46139D-317A-A6DC-73A8-00DF80BA9DEB}"/>
+            </a:ext>
+          </a:extLst>
+        </p:cNvPr>
+        <p:cNvGrpSpPr/>
+        <p:nvPr/>
+      </p:nvGrpSpPr>
+      <p:grpSpPr>
+        <a:xfrm>
+          <a:off x="0" y="0"/>
+          <a:ext cx="0" cy="0"/>
+          <a:chOff x="0" y="0"/>
+          <a:chExt cx="0" cy="0"/>
+        </a:xfrm>
+      </p:grpSpPr>
+      <p:sp>
+        <p:nvSpPr>
+          <p:cNvPr id="2" name="Slide Number Placeholder 1">
+            <a:extLst>
+              <a:ext uri="{FF2B5EF4-FFF2-40B4-BE49-F238E27FC236}">
+                <a16:creationId xmlns:a16="http://schemas.microsoft.com/office/drawing/2014/main" id="{D4A22BA5-2240-D294-83AA-94E6E1F68D9A}"/>
+              </a:ext>
+            </a:extLst>
+          </p:cNvPr>
+          <p:cNvSpPr>
+            <a:spLocks noGrp="1"/>
+          </p:cNvSpPr>
+          <p:nvPr>
+            <p:ph type="sldNum" sz="quarter" idx="4"/>
+          </p:nvPr>
+        </p:nvSpPr>
+        <p:spPr/>
+        <p:txBody>
+          <a:bodyPr/>
+          <a:lstStyle/>
+          <a:p>
+            <a:fld id="{3490C777-6B35-47B1-993A-7400E925DBDB}" type="slidenum">
+              <a:rPr lang="en-US" smtClean="0"/>
+              <a:pPr/>
+              <a:t>9</a:t>
+            </a:fld>
+            <a:endParaRPr lang="en-US" dirty="0">
+              <a:latin typeface="Aptos" panose="020B0004020202020204" pitchFamily="34" charset="0"/>
+            </a:endParaRPr>
+          </a:p>
+        </p:txBody>
+      </p:sp>
+      <p:sp>
+        <p:nvSpPr>
+          <p:cNvPr id="3" name="Title 2">
+            <a:extLst>
+              <a:ext uri="{FF2B5EF4-FFF2-40B4-BE49-F238E27FC236}">
+                <a16:creationId xmlns:a16="http://schemas.microsoft.com/office/drawing/2014/main" id="{04528E83-F4C8-25FF-9165-83EE7C1551C8}"/>
+              </a:ext>
+            </a:extLst>
+          </p:cNvPr>
+          <p:cNvSpPr>
+            <a:spLocks noGrp="1"/>
+          </p:cNvSpPr>
+          <p:nvPr>
+            <p:ph type="title"/>
+          </p:nvPr>
+        </p:nvSpPr>
+        <p:spPr/>
+        <p:txBody>
+          <a:bodyPr/>
+          <a:lstStyle/>
+          <a:p>
+            <a:r>
+              <a:rPr lang="el-GR" dirty="0"/>
+              <a:t>Επίδραση του κινδύνου στην εκκένωση</a:t>
+            </a:r>
+          </a:p>
+        </p:txBody>
+      </p:sp>
+      <p:sp>
+        <p:nvSpPr>
+          <p:cNvPr id="4" name="Text Placeholder 3">
+            <a:extLst>
+              <a:ext uri="{FF2B5EF4-FFF2-40B4-BE49-F238E27FC236}">
+                <a16:creationId xmlns:a16="http://schemas.microsoft.com/office/drawing/2014/main" id="{2C7CCEBB-D98D-B540-FEAA-C036A3EC767C}"/>
+              </a:ext>
+            </a:extLst>
+          </p:cNvPr>
+          <p:cNvSpPr>
+            <a:spLocks noGrp="1"/>
+          </p:cNvSpPr>
+          <p:nvPr>
+            <p:ph type="body" sz="quarter" idx="10"/>
+          </p:nvPr>
+        </p:nvSpPr>
+        <p:spPr/>
+        <p:txBody>
+          <a:bodyPr/>
+          <a:lstStyle/>
+          <a:p>
+            <a:endParaRPr lang="el-GR"/>
+          </a:p>
+        </p:txBody>
+      </p:sp>
+    </p:spTree>
+    <p:extLst>
+      <p:ext uri="{BB962C8B-B14F-4D97-AF65-F5344CB8AC3E}">
+        <p14:creationId xmlns:p14="http://schemas.microsoft.com/office/powerpoint/2010/main" val="3895012083"/>
+      </p:ext>
+    </p:extLst>
+  </p:cSld>
+  <p:clrMapOvr>
+    <a:masterClrMapping/>
+  </p:clrMapOvr>
 </p:sld>
 </file>
 
